--- a/psychologicalReview/figures/fig7.pptx
+++ b/psychologicalReview/figures/fig7.pptx
@@ -199,7 +199,7 @@
           <a:p>
             <a:fld id="{8A83B28F-5980-4142-9501-D49A69669A91}" type="datetimeFigureOut">
               <a:rPr lang="en-US" smtClean="0"/>
-              <a:t>7/14/2025</a:t>
+              <a:t>5/29/2026</a:t>
             </a:fld>
             <a:endParaRPr lang="en-US"/>
           </a:p>
@@ -689,7 +689,7 @@
           <a:p>
             <a:fld id="{571ED88F-9845-47C6-9B84-5938CC22004F}" type="datetimeFigureOut">
               <a:rPr lang="en-US" smtClean="0"/>
-              <a:t>7/14/2025</a:t>
+              <a:t>5/29/2026</a:t>
             </a:fld>
             <a:endParaRPr lang="en-US"/>
           </a:p>
@@ -859,7 +859,7 @@
           <a:p>
             <a:fld id="{571ED88F-9845-47C6-9B84-5938CC22004F}" type="datetimeFigureOut">
               <a:rPr lang="en-US" smtClean="0"/>
-              <a:t>7/14/2025</a:t>
+              <a:t>5/29/2026</a:t>
             </a:fld>
             <a:endParaRPr lang="en-US"/>
           </a:p>
@@ -1039,7 +1039,7 @@
           <a:p>
             <a:fld id="{571ED88F-9845-47C6-9B84-5938CC22004F}" type="datetimeFigureOut">
               <a:rPr lang="en-US" smtClean="0"/>
-              <a:t>7/14/2025</a:t>
+              <a:t>5/29/2026</a:t>
             </a:fld>
             <a:endParaRPr lang="en-US"/>
           </a:p>
@@ -1209,7 +1209,7 @@
           <a:p>
             <a:fld id="{571ED88F-9845-47C6-9B84-5938CC22004F}" type="datetimeFigureOut">
               <a:rPr lang="en-US" smtClean="0"/>
-              <a:t>7/14/2025</a:t>
+              <a:t>5/29/2026</a:t>
             </a:fld>
             <a:endParaRPr lang="en-US"/>
           </a:p>
@@ -1455,7 +1455,7 @@
           <a:p>
             <a:fld id="{571ED88F-9845-47C6-9B84-5938CC22004F}" type="datetimeFigureOut">
               <a:rPr lang="en-US" smtClean="0"/>
-              <a:t>7/14/2025</a:t>
+              <a:t>5/29/2026</a:t>
             </a:fld>
             <a:endParaRPr lang="en-US"/>
           </a:p>
@@ -1687,7 +1687,7 @@
           <a:p>
             <a:fld id="{571ED88F-9845-47C6-9B84-5938CC22004F}" type="datetimeFigureOut">
               <a:rPr lang="en-US" smtClean="0"/>
-              <a:t>7/14/2025</a:t>
+              <a:t>5/29/2026</a:t>
             </a:fld>
             <a:endParaRPr lang="en-US"/>
           </a:p>
@@ -2054,7 +2054,7 @@
           <a:p>
             <a:fld id="{571ED88F-9845-47C6-9B84-5938CC22004F}" type="datetimeFigureOut">
               <a:rPr lang="en-US" smtClean="0"/>
-              <a:t>7/14/2025</a:t>
+              <a:t>5/29/2026</a:t>
             </a:fld>
             <a:endParaRPr lang="en-US"/>
           </a:p>
@@ -2172,7 +2172,7 @@
           <a:p>
             <a:fld id="{571ED88F-9845-47C6-9B84-5938CC22004F}" type="datetimeFigureOut">
               <a:rPr lang="en-US" smtClean="0"/>
-              <a:t>7/14/2025</a:t>
+              <a:t>5/29/2026</a:t>
             </a:fld>
             <a:endParaRPr lang="en-US"/>
           </a:p>
@@ -2267,7 +2267,7 @@
           <a:p>
             <a:fld id="{571ED88F-9845-47C6-9B84-5938CC22004F}" type="datetimeFigureOut">
               <a:rPr lang="en-US" smtClean="0"/>
-              <a:t>7/14/2025</a:t>
+              <a:t>5/29/2026</a:t>
             </a:fld>
             <a:endParaRPr lang="en-US"/>
           </a:p>
@@ -2544,7 +2544,7 @@
           <a:p>
             <a:fld id="{571ED88F-9845-47C6-9B84-5938CC22004F}" type="datetimeFigureOut">
               <a:rPr lang="en-US" smtClean="0"/>
-              <a:t>7/14/2025</a:t>
+              <a:t>5/29/2026</a:t>
             </a:fld>
             <a:endParaRPr lang="en-US"/>
           </a:p>
@@ -2801,7 +2801,7 @@
           <a:p>
             <a:fld id="{571ED88F-9845-47C6-9B84-5938CC22004F}" type="datetimeFigureOut">
               <a:rPr lang="en-US" smtClean="0"/>
-              <a:t>7/14/2025</a:t>
+              <a:t>5/29/2026</a:t>
             </a:fld>
             <a:endParaRPr lang="en-US"/>
           </a:p>
@@ -3014,7 +3014,7 @@
           <a:p>
             <a:fld id="{571ED88F-9845-47C6-9B84-5938CC22004F}" type="datetimeFigureOut">
               <a:rPr lang="en-US" smtClean="0"/>
-              <a:t>7/14/2025</a:t>
+              <a:t>5/29/2026</a:t>
             </a:fld>
             <a:endParaRPr lang="en-US"/>
           </a:p>
@@ -3611,7 +3611,7 @@
         </p:blipFill>
         <p:spPr>
           <a:xfrm>
-            <a:off x="15995020" y="5051128"/>
+            <a:off x="16109320" y="5051128"/>
             <a:ext cx="1373859" cy="1209384"/>
           </a:xfrm>
           <a:prstGeom prst="rect">
@@ -3761,7 +3761,7 @@
         </p:blipFill>
         <p:spPr>
           <a:xfrm>
-            <a:off x="3905315" y="5839216"/>
+            <a:off x="3905315" y="5976376"/>
             <a:ext cx="822380" cy="164476"/>
           </a:xfrm>
           <a:prstGeom prst="rect">
@@ -4173,8 +4173,8 @@
         </p:nvSpPr>
         <p:spPr>
           <a:xfrm>
-            <a:off x="1499306" y="5221199"/>
-            <a:ext cx="1000595" cy="246221"/>
+            <a:off x="1430726" y="5221199"/>
+            <a:ext cx="990977" cy="553998"/>
           </a:xfrm>
           <a:prstGeom prst="rect">
             <a:avLst/>
@@ -4187,98 +4187,43 @@
           </a:bodyPr>
           <a:lstStyle/>
           <a:p>
+            <a:pPr algn="ctr"/>
             <a:r>
               <a:rPr lang="en-US" sz="1000" dirty="0">
                 <a:latin typeface="Times New Roman" panose="02020603050405020304" pitchFamily="18" charset="0"/>
                 <a:cs typeface="Times New Roman" panose="02020603050405020304" pitchFamily="18" charset="0"/>
               </a:rPr>
-              <a:t>Barrier Position</a:t>
-            </a:r>
-          </a:p>
-        </p:txBody>
-      </p:sp>
-      <p:sp>
-        <p:nvSpPr>
-          <p:cNvPr id="59" name="TextBox 58">
-            <a:extLst>
-              <a:ext uri="{FF2B5EF4-FFF2-40B4-BE49-F238E27FC236}">
-                <a16:creationId xmlns:a16="http://schemas.microsoft.com/office/drawing/2014/main" id="{B3A2CB0D-D90C-26D7-3168-9772948AE114}"/>
-              </a:ext>
-            </a:extLst>
-          </p:cNvPr>
-          <p:cNvSpPr txBox="1"/>
-          <p:nvPr/>
-        </p:nvSpPr>
-        <p:spPr>
-          <a:xfrm>
-            <a:off x="2427560" y="5212044"/>
-            <a:ext cx="931665" cy="246221"/>
-          </a:xfrm>
-          <a:prstGeom prst="rect">
-            <a:avLst/>
-          </a:prstGeom>
-          <a:noFill/>
-        </p:spPr>
-        <p:txBody>
-          <a:bodyPr wrap="none" rtlCol="0">
-            <a:spAutoFit/>
-          </a:bodyPr>
-          <a:lstStyle/>
-          <a:p>
+              <a:t>Obstacle </a:t>
+            </a:r>
+          </a:p>
+          <a:p>
+            <a:pPr algn="ctr"/>
             <a:r>
               <a:rPr lang="en-US" sz="1000" dirty="0">
                 <a:latin typeface="Times New Roman" panose="02020603050405020304" pitchFamily="18" charset="0"/>
                 <a:cs typeface="Times New Roman" panose="02020603050405020304" pitchFamily="18" charset="0"/>
               </a:rPr>
-              <a:t>Barrier Height</a:t>
-            </a:r>
-          </a:p>
-        </p:txBody>
-      </p:sp>
-      <p:sp>
-        <p:nvSpPr>
-          <p:cNvPr id="60" name="TextBox 59">
-            <a:extLst>
-              <a:ext uri="{FF2B5EF4-FFF2-40B4-BE49-F238E27FC236}">
-                <a16:creationId xmlns:a16="http://schemas.microsoft.com/office/drawing/2014/main" id="{43C6D27C-92AE-0C44-A0EA-7841BA4E39C4}"/>
-              </a:ext>
-            </a:extLst>
-          </p:cNvPr>
-          <p:cNvSpPr txBox="1"/>
-          <p:nvPr/>
-        </p:nvSpPr>
-        <p:spPr>
-          <a:xfrm>
-            <a:off x="3293608" y="5220941"/>
-            <a:ext cx="1223412" cy="246221"/>
-          </a:xfrm>
-          <a:prstGeom prst="rect">
-            <a:avLst/>
-          </a:prstGeom>
-          <a:noFill/>
-        </p:spPr>
-        <p:txBody>
-          <a:bodyPr wrap="none" rtlCol="0">
-            <a:spAutoFit/>
-          </a:bodyPr>
-          <a:lstStyle/>
-          <a:p>
+              <a:t>Horizontal</a:t>
+            </a:r>
+          </a:p>
+          <a:p>
+            <a:pPr algn="ctr"/>
             <a:r>
               <a:rPr lang="en-US" sz="1000" dirty="0">
                 <a:latin typeface="Times New Roman" panose="02020603050405020304" pitchFamily="18" charset="0"/>
                 <a:cs typeface="Times New Roman" panose="02020603050405020304" pitchFamily="18" charset="0"/>
               </a:rPr>
-              <a:t>Margin of clearance</a:t>
-            </a:r>
-          </a:p>
-        </p:txBody>
-      </p:sp>
-      <p:sp>
-        <p:nvSpPr>
-          <p:cNvPr id="61" name="TextBox 60">
-            <a:extLst>
-              <a:ext uri="{FF2B5EF4-FFF2-40B4-BE49-F238E27FC236}">
-                <a16:creationId xmlns:a16="http://schemas.microsoft.com/office/drawing/2014/main" id="{5F0D5AF8-36A9-F1F7-3DF3-9630F329A870}"/>
+              <a:t>Spatial Position</a:t>
+            </a:r>
+          </a:p>
+        </p:txBody>
+      </p:sp>
+      <p:sp>
+        <p:nvSpPr>
+          <p:cNvPr id="59" name="TextBox 58">
+            <a:extLst>
+              <a:ext uri="{FF2B5EF4-FFF2-40B4-BE49-F238E27FC236}">
+                <a16:creationId xmlns:a16="http://schemas.microsoft.com/office/drawing/2014/main" id="{B3A2CB0D-D90C-26D7-3168-9772948AE114}"/>
               </a:ext>
             </a:extLst>
           </p:cNvPr>
@@ -4287,8 +4232,8 @@
         </p:nvSpPr>
         <p:spPr>
           <a:xfrm>
-            <a:off x="5068301" y="5242830"/>
-            <a:ext cx="843501" cy="246221"/>
+            <a:off x="2427560" y="5212044"/>
+            <a:ext cx="1016625" cy="246221"/>
           </a:xfrm>
           <a:prstGeom prst="rect">
             <a:avLst/>
@@ -4306,17 +4251,17 @@
                 <a:latin typeface="Times New Roman" panose="02020603050405020304" pitchFamily="18" charset="0"/>
                 <a:cs typeface="Times New Roman" panose="02020603050405020304" pitchFamily="18" charset="0"/>
               </a:rPr>
-              <a:t>Jump Height</a:t>
-            </a:r>
-          </a:p>
-        </p:txBody>
-      </p:sp>
-      <p:sp>
-        <p:nvSpPr>
-          <p:cNvPr id="62" name="TextBox 61">
-            <a:extLst>
-              <a:ext uri="{FF2B5EF4-FFF2-40B4-BE49-F238E27FC236}">
-                <a16:creationId xmlns:a16="http://schemas.microsoft.com/office/drawing/2014/main" id="{1869D84F-25AD-9984-E08A-612868B7F4EF}"/>
+              <a:t>Obstacle Height</a:t>
+            </a:r>
+          </a:p>
+        </p:txBody>
+      </p:sp>
+      <p:sp>
+        <p:nvSpPr>
+          <p:cNvPr id="60" name="TextBox 59">
+            <a:extLst>
+              <a:ext uri="{FF2B5EF4-FFF2-40B4-BE49-F238E27FC236}">
+                <a16:creationId xmlns:a16="http://schemas.microsoft.com/office/drawing/2014/main" id="{43C6D27C-92AE-0C44-A0EA-7841BA4E39C4}"/>
               </a:ext>
             </a:extLst>
           </p:cNvPr>
@@ -4325,8 +4270,8 @@
         </p:nvSpPr>
         <p:spPr>
           <a:xfrm>
-            <a:off x="5868415" y="5244401"/>
-            <a:ext cx="857927" cy="246221"/>
+            <a:off x="3339328" y="5220941"/>
+            <a:ext cx="1215397" cy="400110"/>
           </a:xfrm>
           <a:prstGeom prst="rect">
             <a:avLst/>
@@ -4339,60 +4284,33 @@
           </a:bodyPr>
           <a:lstStyle/>
           <a:p>
+            <a:pPr algn="ctr"/>
             <a:r>
               <a:rPr lang="en-US" sz="1000" dirty="0">
                 <a:latin typeface="Times New Roman" panose="02020603050405020304" pitchFamily="18" charset="0"/>
                 <a:cs typeface="Times New Roman" panose="02020603050405020304" pitchFamily="18" charset="0"/>
               </a:rPr>
-              <a:t>Motion Type</a:t>
-            </a:r>
-          </a:p>
-        </p:txBody>
-      </p:sp>
-      <p:sp>
-        <p:nvSpPr>
-          <p:cNvPr id="63" name="TextBox 62">
-            <a:extLst>
-              <a:ext uri="{FF2B5EF4-FFF2-40B4-BE49-F238E27FC236}">
-                <a16:creationId xmlns:a16="http://schemas.microsoft.com/office/drawing/2014/main" id="{167A5DB3-3E9E-873F-E754-0F7C423F376D}"/>
-              </a:ext>
-            </a:extLst>
-          </p:cNvPr>
-          <p:cNvSpPr txBox="1"/>
-          <p:nvPr/>
-        </p:nvSpPr>
-        <p:spPr>
-          <a:xfrm>
-            <a:off x="4412704" y="5230872"/>
-            <a:ext cx="774571" cy="246221"/>
-          </a:xfrm>
-          <a:prstGeom prst="rect">
-            <a:avLst/>
-          </a:prstGeom>
-          <a:noFill/>
-        </p:spPr>
-        <p:txBody>
-          <a:bodyPr wrap="none" rtlCol="0">
-            <a:spAutoFit/>
-          </a:bodyPr>
-          <a:lstStyle/>
-          <a:p>
+              <a:t>Arc Apex-Obstacle </a:t>
+            </a:r>
+          </a:p>
+          <a:p>
+            <a:pPr algn="ctr"/>
             <a:r>
               <a:rPr lang="en-US" sz="1000" dirty="0">
                 <a:latin typeface="Times New Roman" panose="02020603050405020304" pitchFamily="18" charset="0"/>
                 <a:cs typeface="Times New Roman" panose="02020603050405020304" pitchFamily="18" charset="0"/>
               </a:rPr>
-              <a:t>Contiguous</a:t>
-            </a:r>
-          </a:p>
-        </p:txBody>
-      </p:sp>
-      <p:sp>
-        <p:nvSpPr>
-          <p:cNvPr id="64" name="TextBox 63">
-            <a:extLst>
-              <a:ext uri="{FF2B5EF4-FFF2-40B4-BE49-F238E27FC236}">
-                <a16:creationId xmlns:a16="http://schemas.microsoft.com/office/drawing/2014/main" id="{1EF4C621-13E9-C551-2009-9FA0875B01F5}"/>
+              <a:t>Gap</a:t>
+            </a:r>
+          </a:p>
+        </p:txBody>
+      </p:sp>
+      <p:sp>
+        <p:nvSpPr>
+          <p:cNvPr id="61" name="TextBox 60">
+            <a:extLst>
+              <a:ext uri="{FF2B5EF4-FFF2-40B4-BE49-F238E27FC236}">
+                <a16:creationId xmlns:a16="http://schemas.microsoft.com/office/drawing/2014/main" id="{5F0D5AF8-36A9-F1F7-3DF3-9630F329A870}"/>
               </a:ext>
             </a:extLst>
           </p:cNvPr>
@@ -4401,8 +4319,8 @@
         </p:nvSpPr>
         <p:spPr>
           <a:xfrm>
-            <a:off x="2999204" y="5540165"/>
-            <a:ext cx="2553904" cy="246221"/>
+            <a:off x="5068301" y="5242830"/>
+            <a:ext cx="692818" cy="400110"/>
           </a:xfrm>
           <a:prstGeom prst="rect">
             <a:avLst/>
@@ -4415,50 +4333,148 @@
           </a:bodyPr>
           <a:lstStyle/>
           <a:p>
+            <a:pPr algn="ctr"/>
             <a:r>
               <a:rPr lang="en-US" sz="1000" dirty="0">
                 <a:latin typeface="Times New Roman" panose="02020603050405020304" pitchFamily="18" charset="0"/>
                 <a:cs typeface="Times New Roman" panose="02020603050405020304" pitchFamily="18" charset="0"/>
               </a:rPr>
-              <a:t>Position of entity/object on the left at time = 0</a:t>
-            </a:r>
-          </a:p>
-        </p:txBody>
-      </p:sp>
-      <p:sp>
-        <p:nvSpPr>
-          <p:cNvPr id="65" name="TextBox 64">
-            <a:extLst>
-              <a:ext uri="{FF2B5EF4-FFF2-40B4-BE49-F238E27FC236}">
-                <a16:creationId xmlns:a16="http://schemas.microsoft.com/office/drawing/2014/main" id="{828E2359-3256-66DD-05E8-3307EF2BB19E}"/>
-              </a:ext>
-            </a:extLst>
-          </p:cNvPr>
-          <p:cNvSpPr txBox="1"/>
-          <p:nvPr/>
-        </p:nvSpPr>
-        <p:spPr>
-          <a:xfrm>
-            <a:off x="2980118" y="800218"/>
-            <a:ext cx="2553904" cy="246221"/>
-          </a:xfrm>
-          <a:prstGeom prst="rect">
-            <a:avLst/>
-          </a:prstGeom>
-          <a:noFill/>
-        </p:spPr>
-        <p:txBody>
-          <a:bodyPr wrap="none" rtlCol="0">
-            <a:spAutoFit/>
-          </a:bodyPr>
-          <a:lstStyle/>
-          <a:p>
+              <a:t>Arc Peak </a:t>
+            </a:r>
+          </a:p>
+          <a:p>
+            <a:pPr algn="ctr"/>
             <a:r>
               <a:rPr lang="en-US" sz="1000" dirty="0">
                 <a:latin typeface="Times New Roman" panose="02020603050405020304" pitchFamily="18" charset="0"/>
                 <a:cs typeface="Times New Roman" panose="02020603050405020304" pitchFamily="18" charset="0"/>
               </a:rPr>
-              <a:t>Position of entity/object on the left at time = 1</a:t>
+              <a:t>Height</a:t>
+            </a:r>
+          </a:p>
+        </p:txBody>
+      </p:sp>
+      <p:sp>
+        <p:nvSpPr>
+          <p:cNvPr id="62" name="TextBox 61">
+            <a:extLst>
+              <a:ext uri="{FF2B5EF4-FFF2-40B4-BE49-F238E27FC236}">
+                <a16:creationId xmlns:a16="http://schemas.microsoft.com/office/drawing/2014/main" id="{1869D84F-25AD-9984-E08A-612868B7F4EF}"/>
+              </a:ext>
+            </a:extLst>
+          </p:cNvPr>
+          <p:cNvSpPr txBox="1"/>
+          <p:nvPr/>
+        </p:nvSpPr>
+        <p:spPr>
+          <a:xfrm>
+            <a:off x="5868415" y="5244401"/>
+            <a:ext cx="1160895" cy="400110"/>
+          </a:xfrm>
+          <a:prstGeom prst="rect">
+            <a:avLst/>
+          </a:prstGeom>
+          <a:noFill/>
+        </p:spPr>
+        <p:txBody>
+          <a:bodyPr wrap="none" rtlCol="0">
+            <a:spAutoFit/>
+          </a:bodyPr>
+          <a:lstStyle/>
+          <a:p>
+            <a:pPr algn="ctr"/>
+            <a:r>
+              <a:rPr lang="en-US" sz="1000" dirty="0">
+                <a:latin typeface="Times New Roman" panose="02020603050405020304" pitchFamily="18" charset="0"/>
+                <a:cs typeface="Times New Roman" panose="02020603050405020304" pitchFamily="18" charset="0"/>
+              </a:rPr>
+              <a:t>Kinematic Motion </a:t>
+            </a:r>
+          </a:p>
+          <a:p>
+            <a:pPr algn="ctr"/>
+            <a:r>
+              <a:rPr lang="en-US" sz="1000" dirty="0">
+                <a:latin typeface="Times New Roman" panose="02020603050405020304" pitchFamily="18" charset="0"/>
+                <a:cs typeface="Times New Roman" panose="02020603050405020304" pitchFamily="18" charset="0"/>
+              </a:rPr>
+              <a:t>Type</a:t>
+            </a:r>
+          </a:p>
+        </p:txBody>
+      </p:sp>
+      <p:sp>
+        <p:nvSpPr>
+          <p:cNvPr id="64" name="TextBox 63">
+            <a:extLst>
+              <a:ext uri="{FF2B5EF4-FFF2-40B4-BE49-F238E27FC236}">
+                <a16:creationId xmlns:a16="http://schemas.microsoft.com/office/drawing/2014/main" id="{1EF4C621-13E9-C551-2009-9FA0875B01F5}"/>
+              </a:ext>
+            </a:extLst>
+          </p:cNvPr>
+          <p:cNvSpPr txBox="1"/>
+          <p:nvPr/>
+        </p:nvSpPr>
+        <p:spPr>
+          <a:xfrm>
+            <a:off x="3376394" y="5723045"/>
+            <a:ext cx="1834156" cy="246221"/>
+          </a:xfrm>
+          <a:prstGeom prst="rect">
+            <a:avLst/>
+          </a:prstGeom>
+          <a:noFill/>
+        </p:spPr>
+        <p:txBody>
+          <a:bodyPr wrap="none" rtlCol="0">
+            <a:spAutoFit/>
+          </a:bodyPr>
+          <a:lstStyle/>
+          <a:p>
+            <a:r>
+              <a:rPr lang="en-US" sz="1000" dirty="0">
+                <a:latin typeface="Times New Roman" panose="02020603050405020304" pitchFamily="18" charset="0"/>
+                <a:cs typeface="Times New Roman" panose="02020603050405020304" pitchFamily="18" charset="0"/>
+              </a:rPr>
+              <a:t>Horizontal Position at time = 0</a:t>
+            </a:r>
+          </a:p>
+        </p:txBody>
+      </p:sp>
+      <p:sp>
+        <p:nvSpPr>
+          <p:cNvPr id="65" name="TextBox 64">
+            <a:extLst>
+              <a:ext uri="{FF2B5EF4-FFF2-40B4-BE49-F238E27FC236}">
+                <a16:creationId xmlns:a16="http://schemas.microsoft.com/office/drawing/2014/main" id="{828E2359-3256-66DD-05E8-3307EF2BB19E}"/>
+              </a:ext>
+            </a:extLst>
+          </p:cNvPr>
+          <p:cNvSpPr txBox="1"/>
+          <p:nvPr/>
+        </p:nvSpPr>
+        <p:spPr>
+          <a:xfrm>
+            <a:off x="3460178" y="800218"/>
+            <a:ext cx="1770036" cy="246221"/>
+          </a:xfrm>
+          <a:prstGeom prst="rect">
+            <a:avLst/>
+          </a:prstGeom>
+          <a:noFill/>
+        </p:spPr>
+        <p:txBody>
+          <a:bodyPr wrap="none" rtlCol="0">
+            <a:spAutoFit/>
+          </a:bodyPr>
+          <a:lstStyle/>
+          <a:p>
+            <a:r>
+              <a:rPr lang="en-US" sz="1000" dirty="0">
+                <a:latin typeface="Times New Roman" panose="02020603050405020304" pitchFamily="18" charset="0"/>
+                <a:cs typeface="Times New Roman" panose="02020603050405020304" pitchFamily="18" charset="0"/>
+              </a:rPr>
+              <a:t>Horizontal Position at time = 1</a:t>
             </a:r>
           </a:p>
         </p:txBody>
@@ -4793,234 +4809,6 @@
           </a:prstGeom>
         </p:spPr>
       </p:pic>
-      <p:sp>
-        <p:nvSpPr>
-          <p:cNvPr id="90" name="TextBox 89">
-            <a:extLst>
-              <a:ext uri="{FF2B5EF4-FFF2-40B4-BE49-F238E27FC236}">
-                <a16:creationId xmlns:a16="http://schemas.microsoft.com/office/drawing/2014/main" id="{4DF7A92D-CE22-D3C4-725C-0F2BE9C0333E}"/>
-              </a:ext>
-            </a:extLst>
-          </p:cNvPr>
-          <p:cNvSpPr txBox="1"/>
-          <p:nvPr/>
-        </p:nvSpPr>
-        <p:spPr>
-          <a:xfrm>
-            <a:off x="10489200" y="5265455"/>
-            <a:ext cx="1000595" cy="246221"/>
-          </a:xfrm>
-          <a:prstGeom prst="rect">
-            <a:avLst/>
-          </a:prstGeom>
-          <a:noFill/>
-        </p:spPr>
-        <p:txBody>
-          <a:bodyPr wrap="none" rtlCol="0">
-            <a:spAutoFit/>
-          </a:bodyPr>
-          <a:lstStyle/>
-          <a:p>
-            <a:r>
-              <a:rPr lang="en-US" sz="1000" dirty="0">
-                <a:latin typeface="Times New Roman" panose="02020603050405020304" pitchFamily="18" charset="0"/>
-                <a:cs typeface="Times New Roman" panose="02020603050405020304" pitchFamily="18" charset="0"/>
-              </a:rPr>
-              <a:t>Barrier Position</a:t>
-            </a:r>
-          </a:p>
-        </p:txBody>
-      </p:sp>
-      <p:sp>
-        <p:nvSpPr>
-          <p:cNvPr id="91" name="TextBox 90">
-            <a:extLst>
-              <a:ext uri="{FF2B5EF4-FFF2-40B4-BE49-F238E27FC236}">
-                <a16:creationId xmlns:a16="http://schemas.microsoft.com/office/drawing/2014/main" id="{C4243D52-11C8-99EA-7A13-120FA2B18B34}"/>
-              </a:ext>
-            </a:extLst>
-          </p:cNvPr>
-          <p:cNvSpPr txBox="1"/>
-          <p:nvPr/>
-        </p:nvSpPr>
-        <p:spPr>
-          <a:xfrm>
-            <a:off x="11417454" y="5256300"/>
-            <a:ext cx="931665" cy="246221"/>
-          </a:xfrm>
-          <a:prstGeom prst="rect">
-            <a:avLst/>
-          </a:prstGeom>
-          <a:noFill/>
-        </p:spPr>
-        <p:txBody>
-          <a:bodyPr wrap="none" rtlCol="0">
-            <a:spAutoFit/>
-          </a:bodyPr>
-          <a:lstStyle/>
-          <a:p>
-            <a:r>
-              <a:rPr lang="en-US" sz="1000" dirty="0">
-                <a:latin typeface="Times New Roman" panose="02020603050405020304" pitchFamily="18" charset="0"/>
-                <a:cs typeface="Times New Roman" panose="02020603050405020304" pitchFamily="18" charset="0"/>
-              </a:rPr>
-              <a:t>Barrier Height</a:t>
-            </a:r>
-          </a:p>
-        </p:txBody>
-      </p:sp>
-      <p:sp>
-        <p:nvSpPr>
-          <p:cNvPr id="92" name="TextBox 91">
-            <a:extLst>
-              <a:ext uri="{FF2B5EF4-FFF2-40B4-BE49-F238E27FC236}">
-                <a16:creationId xmlns:a16="http://schemas.microsoft.com/office/drawing/2014/main" id="{E327C285-D271-DACB-AD22-38E5DB0C44FB}"/>
-              </a:ext>
-            </a:extLst>
-          </p:cNvPr>
-          <p:cNvSpPr txBox="1"/>
-          <p:nvPr/>
-        </p:nvSpPr>
-        <p:spPr>
-          <a:xfrm>
-            <a:off x="12409232" y="5265197"/>
-            <a:ext cx="1223412" cy="246221"/>
-          </a:xfrm>
-          <a:prstGeom prst="rect">
-            <a:avLst/>
-          </a:prstGeom>
-          <a:noFill/>
-        </p:spPr>
-        <p:txBody>
-          <a:bodyPr wrap="none" rtlCol="0">
-            <a:spAutoFit/>
-          </a:bodyPr>
-          <a:lstStyle/>
-          <a:p>
-            <a:r>
-              <a:rPr lang="en-US" sz="1000" dirty="0">
-                <a:latin typeface="Times New Roman" panose="02020603050405020304" pitchFamily="18" charset="0"/>
-                <a:cs typeface="Times New Roman" panose="02020603050405020304" pitchFamily="18" charset="0"/>
-              </a:rPr>
-              <a:t>Margin of clearance</a:t>
-            </a:r>
-          </a:p>
-        </p:txBody>
-      </p:sp>
-      <p:sp>
-        <p:nvSpPr>
-          <p:cNvPr id="93" name="TextBox 92">
-            <a:extLst>
-              <a:ext uri="{FF2B5EF4-FFF2-40B4-BE49-F238E27FC236}">
-                <a16:creationId xmlns:a16="http://schemas.microsoft.com/office/drawing/2014/main" id="{CEDDC217-1654-D1DA-692B-A8A2B5824DED}"/>
-              </a:ext>
-            </a:extLst>
-          </p:cNvPr>
-          <p:cNvSpPr txBox="1"/>
-          <p:nvPr/>
-        </p:nvSpPr>
-        <p:spPr>
-          <a:xfrm>
-            <a:off x="14340831" y="5297890"/>
-            <a:ext cx="843501" cy="246221"/>
-          </a:xfrm>
-          <a:prstGeom prst="rect">
-            <a:avLst/>
-          </a:prstGeom>
-          <a:noFill/>
-        </p:spPr>
-        <p:txBody>
-          <a:bodyPr wrap="none" rtlCol="0">
-            <a:spAutoFit/>
-          </a:bodyPr>
-          <a:lstStyle/>
-          <a:p>
-            <a:r>
-              <a:rPr lang="en-US" sz="1000" dirty="0">
-                <a:latin typeface="Times New Roman" panose="02020603050405020304" pitchFamily="18" charset="0"/>
-                <a:cs typeface="Times New Roman" panose="02020603050405020304" pitchFamily="18" charset="0"/>
-              </a:rPr>
-              <a:t>Jump Height</a:t>
-            </a:r>
-          </a:p>
-        </p:txBody>
-      </p:sp>
-      <p:sp>
-        <p:nvSpPr>
-          <p:cNvPr id="94" name="TextBox 93">
-            <a:extLst>
-              <a:ext uri="{FF2B5EF4-FFF2-40B4-BE49-F238E27FC236}">
-                <a16:creationId xmlns:a16="http://schemas.microsoft.com/office/drawing/2014/main" id="{DD359EED-E7EC-A86F-CBC8-53D92B773FE9}"/>
-              </a:ext>
-            </a:extLst>
-          </p:cNvPr>
-          <p:cNvSpPr txBox="1"/>
-          <p:nvPr/>
-        </p:nvSpPr>
-        <p:spPr>
-          <a:xfrm>
-            <a:off x="15190475" y="5298449"/>
-            <a:ext cx="857927" cy="246221"/>
-          </a:xfrm>
-          <a:prstGeom prst="rect">
-            <a:avLst/>
-          </a:prstGeom>
-          <a:noFill/>
-        </p:spPr>
-        <p:txBody>
-          <a:bodyPr wrap="none" rtlCol="0">
-            <a:spAutoFit/>
-          </a:bodyPr>
-          <a:lstStyle/>
-          <a:p>
-            <a:r>
-              <a:rPr lang="en-US" sz="1000" dirty="0">
-                <a:latin typeface="Times New Roman" panose="02020603050405020304" pitchFamily="18" charset="0"/>
-                <a:cs typeface="Times New Roman" panose="02020603050405020304" pitchFamily="18" charset="0"/>
-              </a:rPr>
-              <a:t>Motion Type</a:t>
-            </a:r>
-          </a:p>
-        </p:txBody>
-      </p:sp>
-      <p:sp>
-        <p:nvSpPr>
-          <p:cNvPr id="95" name="TextBox 94">
-            <a:extLst>
-              <a:ext uri="{FF2B5EF4-FFF2-40B4-BE49-F238E27FC236}">
-                <a16:creationId xmlns:a16="http://schemas.microsoft.com/office/drawing/2014/main" id="{07AB8E44-3FBE-81D1-DA53-F3F3B6D0B9F2}"/>
-              </a:ext>
-            </a:extLst>
-          </p:cNvPr>
-          <p:cNvSpPr txBox="1"/>
-          <p:nvPr/>
-        </p:nvSpPr>
-        <p:spPr>
-          <a:xfrm>
-            <a:off x="13596908" y="5275128"/>
-            <a:ext cx="774571" cy="246221"/>
-          </a:xfrm>
-          <a:prstGeom prst="rect">
-            <a:avLst/>
-          </a:prstGeom>
-          <a:noFill/>
-        </p:spPr>
-        <p:txBody>
-          <a:bodyPr wrap="none" rtlCol="0">
-            <a:spAutoFit/>
-          </a:bodyPr>
-          <a:lstStyle/>
-          <a:p>
-            <a:r>
-              <a:rPr lang="en-US" sz="1000" dirty="0">
-                <a:latin typeface="Times New Roman" panose="02020603050405020304" pitchFamily="18" charset="0"/>
-                <a:cs typeface="Times New Roman" panose="02020603050405020304" pitchFamily="18" charset="0"/>
-              </a:rPr>
-              <a:t>Contiguous</a:t>
-            </a:r>
-          </a:p>
-        </p:txBody>
-      </p:sp>
       <p:pic>
         <p:nvPicPr>
           <p:cNvPr id="97" name="Picture 96">
@@ -5043,7 +4831,7 @@
         </p:blipFill>
         <p:spPr>
           <a:xfrm>
-            <a:off x="13287344" y="5759021"/>
+            <a:off x="13287344" y="5896181"/>
             <a:ext cx="847725" cy="171450"/>
           </a:xfrm>
           <a:prstGeom prst="rect">
@@ -5065,8 +4853,8 @@
         </p:nvSpPr>
         <p:spPr>
           <a:xfrm>
-            <a:off x="12267094" y="5532712"/>
-            <a:ext cx="2553904" cy="246221"/>
+            <a:off x="12804304" y="5669872"/>
+            <a:ext cx="1770036" cy="246221"/>
           </a:xfrm>
           <a:prstGeom prst="rect">
             <a:avLst/>
@@ -5084,7 +4872,7 @@
                 <a:latin typeface="Times New Roman" panose="02020603050405020304" pitchFamily="18" charset="0"/>
                 <a:cs typeface="Times New Roman" panose="02020603050405020304" pitchFamily="18" charset="0"/>
               </a:rPr>
-              <a:t>Position of entity/object on the left at time = 0</a:t>
+              <a:t>Horizontal Position at time = 0</a:t>
             </a:r>
           </a:p>
         </p:txBody>
@@ -5313,8 +5101,8 @@
         </p:nvSpPr>
         <p:spPr>
           <a:xfrm>
-            <a:off x="12183130" y="658227"/>
-            <a:ext cx="2553904" cy="246221"/>
+            <a:off x="12651760" y="703947"/>
+            <a:ext cx="1770036" cy="246221"/>
           </a:xfrm>
           <a:prstGeom prst="rect">
             <a:avLst/>
@@ -5332,7 +5120,7 @@
                 <a:latin typeface="Times New Roman" panose="02020603050405020304" pitchFamily="18" charset="0"/>
                 <a:cs typeface="Times New Roman" panose="02020603050405020304" pitchFamily="18" charset="0"/>
               </a:rPr>
-              <a:t>Position of entity/object on the left at time = 1</a:t>
+              <a:t>Horizontal Position at time = 2</a:t>
             </a:r>
           </a:p>
         </p:txBody>
@@ -5734,7 +5522,7 @@
         <p:spPr>
           <a:xfrm>
             <a:off x="9014911" y="4596444"/>
-            <a:ext cx="8430623" cy="1977390"/>
+            <a:ext cx="8644439" cy="1977390"/>
           </a:xfrm>
           <a:prstGeom prst="rect">
             <a:avLst/>
@@ -5960,9 +5748,8 @@
             <a:avLst/>
           </a:prstGeom>
           <a:solidFill>
-            <a:schemeClr val="accent4">
-              <a:lumMod val="20000"/>
-              <a:lumOff val="80000"/>
+            <a:schemeClr val="bg2">
+              <a:lumMod val="90000"/>
             </a:schemeClr>
           </a:solidFill>
         </p:spPr>
@@ -6003,9 +5790,8 @@
             <a:avLst/>
           </a:prstGeom>
           <a:solidFill>
-            <a:schemeClr val="accent4">
-              <a:lumMod val="20000"/>
-              <a:lumOff val="80000"/>
+            <a:schemeClr val="bg2">
+              <a:lumMod val="90000"/>
             </a:schemeClr>
           </a:solidFill>
         </p:spPr>
@@ -7215,7 +7001,7 @@
         <p:spPr>
           <a:xfrm>
             <a:off x="21831" y="4830044"/>
-            <a:ext cx="1287532" cy="246221"/>
+            <a:ext cx="1300356" cy="246221"/>
           </a:xfrm>
           <a:prstGeom prst="rect">
             <a:avLst/>
@@ -7233,7 +7019,7 @@
                 <a:latin typeface="Times New Roman" panose="02020603050405020304" pitchFamily="18" charset="0"/>
                 <a:cs typeface="Times New Roman" panose="02020603050405020304" pitchFamily="18" charset="0"/>
               </a:rPr>
-              <a:t>Entity/object features</a:t>
+              <a:t>Surface Property Left</a:t>
             </a:r>
           </a:p>
         </p:txBody>
@@ -7253,7 +7039,7 @@
         <p:spPr>
           <a:xfrm>
             <a:off x="7175984" y="4848264"/>
-            <a:ext cx="1287532" cy="246221"/>
+            <a:ext cx="1369286" cy="246221"/>
           </a:xfrm>
           <a:prstGeom prst="rect">
             <a:avLst/>
@@ -7271,7 +7057,7 @@
                 <a:latin typeface="Times New Roman" panose="02020603050405020304" pitchFamily="18" charset="0"/>
                 <a:cs typeface="Times New Roman" panose="02020603050405020304" pitchFamily="18" charset="0"/>
               </a:rPr>
-              <a:t>Entity/object features</a:t>
+              <a:t>Surface Property Right</a:t>
             </a:r>
           </a:p>
         </p:txBody>
@@ -7416,8 +7202,8 @@
         </p:nvSpPr>
         <p:spPr>
           <a:xfrm>
-            <a:off x="2254923" y="4709334"/>
-            <a:ext cx="723275" cy="246221"/>
+            <a:off x="2289213" y="4709334"/>
+            <a:ext cx="548548" cy="246221"/>
           </a:xfrm>
           <a:prstGeom prst="rect">
             <a:avLst/>
@@ -7435,7 +7221,7 @@
                 <a:latin typeface="Times New Roman" panose="02020603050405020304" pitchFamily="18" charset="0"/>
                 <a:cs typeface="Times New Roman" panose="02020603050405020304" pitchFamily="18" charset="0"/>
               </a:rPr>
-              <a:t>No Height</a:t>
+              <a:t>Absent</a:t>
             </a:r>
           </a:p>
         </p:txBody>
@@ -7580,8 +7366,8 @@
         </p:nvSpPr>
         <p:spPr>
           <a:xfrm>
-            <a:off x="5115429" y="4675773"/>
-            <a:ext cx="939681" cy="246221"/>
+            <a:off x="5012559" y="4675773"/>
+            <a:ext cx="1138453" cy="246221"/>
           </a:xfrm>
           <a:prstGeom prst="rect">
             <a:avLst/>
@@ -7599,7 +7385,7 @@
                 <a:latin typeface="Times New Roman" panose="02020603050405020304" pitchFamily="18" charset="0"/>
                 <a:cs typeface="Times New Roman" panose="02020603050405020304" pitchFamily="18" charset="0"/>
               </a:rPr>
-              <a:t>Jump Height 4</a:t>
+              <a:t>Arc Peak Height 4</a:t>
             </a:r>
           </a:p>
         </p:txBody>
@@ -7619,7 +7405,7 @@
         <p:spPr>
           <a:xfrm>
             <a:off x="6028572" y="4699167"/>
-            <a:ext cx="971741" cy="246221"/>
+            <a:ext cx="760144" cy="246221"/>
           </a:xfrm>
           <a:prstGeom prst="rect">
             <a:avLst/>
@@ -7637,7 +7423,7 @@
                 <a:latin typeface="Times New Roman" panose="02020603050405020304" pitchFamily="18" charset="0"/>
                 <a:cs typeface="Times New Roman" panose="02020603050405020304" pitchFamily="18" charset="0"/>
               </a:rPr>
-              <a:t>Curved Motion</a:t>
+              <a:t>Arced Path</a:t>
             </a:r>
           </a:p>
         </p:txBody>
@@ -7990,8 +7776,8 @@
         </p:nvSpPr>
         <p:spPr>
           <a:xfrm>
-            <a:off x="14124126" y="4695907"/>
-            <a:ext cx="723275" cy="246221"/>
+            <a:off x="14066976" y="4673047"/>
+            <a:ext cx="1098378" cy="246221"/>
           </a:xfrm>
           <a:prstGeom prst="rect">
             <a:avLst/>
@@ -8009,7 +7795,7 @@
                 <a:latin typeface="Times New Roman" panose="02020603050405020304" pitchFamily="18" charset="0"/>
                 <a:cs typeface="Times New Roman" panose="02020603050405020304" pitchFamily="18" charset="0"/>
               </a:rPr>
-              <a:t>No Height</a:t>
+              <a:t>No Arced Motion</a:t>
             </a:r>
           </a:p>
         </p:txBody>
@@ -8029,7 +7815,7 @@
         <p:spPr>
           <a:xfrm>
             <a:off x="15037269" y="4683205"/>
-            <a:ext cx="998991" cy="246221"/>
+            <a:ext cx="780983" cy="246221"/>
           </a:xfrm>
           <a:prstGeom prst="rect">
             <a:avLst/>
@@ -8047,7 +7833,7 @@
                 <a:latin typeface="Times New Roman" panose="02020603050405020304" pitchFamily="18" charset="0"/>
                 <a:cs typeface="Times New Roman" panose="02020603050405020304" pitchFamily="18" charset="0"/>
               </a:rPr>
-              <a:t>Straight Motion</a:t>
+              <a:t>Linear Path</a:t>
             </a:r>
           </a:p>
         </p:txBody>
@@ -8126,6 +7912,484 @@
           </a:prstGeom>
         </p:spPr>
       </p:pic>
+      <p:sp>
+        <p:nvSpPr>
+          <p:cNvPr id="63" name="TextBox 62">
+            <a:extLst>
+              <a:ext uri="{FF2B5EF4-FFF2-40B4-BE49-F238E27FC236}">
+                <a16:creationId xmlns:a16="http://schemas.microsoft.com/office/drawing/2014/main" id="{167A5DB3-3E9E-873F-E754-0F7C423F376D}"/>
+              </a:ext>
+            </a:extLst>
+          </p:cNvPr>
+          <p:cNvSpPr txBox="1"/>
+          <p:nvPr/>
+        </p:nvSpPr>
+        <p:spPr>
+          <a:xfrm>
+            <a:off x="4412704" y="5196582"/>
+            <a:ext cx="736099" cy="400110"/>
+          </a:xfrm>
+          <a:prstGeom prst="rect">
+            <a:avLst/>
+          </a:prstGeom>
+          <a:noFill/>
+        </p:spPr>
+        <p:txBody>
+          <a:bodyPr wrap="none" rtlCol="0">
+            <a:spAutoFit/>
+          </a:bodyPr>
+          <a:lstStyle/>
+          <a:p>
+            <a:pPr algn="ctr"/>
+            <a:r>
+              <a:rPr lang="en-US" sz="1000" dirty="0">
+                <a:latin typeface="Times New Roman" panose="02020603050405020304" pitchFamily="18" charset="0"/>
+                <a:cs typeface="Times New Roman" panose="02020603050405020304" pitchFamily="18" charset="0"/>
+              </a:rPr>
+              <a:t>Final </a:t>
+            </a:r>
+          </a:p>
+          <a:p>
+            <a:pPr algn="ctr"/>
+            <a:r>
+              <a:rPr lang="en-US" sz="1000" dirty="0">
+                <a:latin typeface="Times New Roman" panose="02020603050405020304" pitchFamily="18" charset="0"/>
+                <a:cs typeface="Times New Roman" panose="02020603050405020304" pitchFamily="18" charset="0"/>
+              </a:rPr>
+              <a:t>Adjacency</a:t>
+            </a:r>
+          </a:p>
+        </p:txBody>
+      </p:sp>
+      <p:sp>
+        <p:nvSpPr>
+          <p:cNvPr id="27" name="TextBox 26">
+            <a:extLst>
+              <a:ext uri="{FF2B5EF4-FFF2-40B4-BE49-F238E27FC236}">
+                <a16:creationId xmlns:a16="http://schemas.microsoft.com/office/drawing/2014/main" id="{0DAFCDB9-16E0-CD26-2171-70E99C427369}"/>
+              </a:ext>
+            </a:extLst>
+          </p:cNvPr>
+          <p:cNvSpPr txBox="1"/>
+          <p:nvPr/>
+        </p:nvSpPr>
+        <p:spPr>
+          <a:xfrm>
+            <a:off x="15068800" y="5292594"/>
+            <a:ext cx="1160895" cy="400110"/>
+          </a:xfrm>
+          <a:prstGeom prst="rect">
+            <a:avLst/>
+          </a:prstGeom>
+          <a:noFill/>
+        </p:spPr>
+        <p:txBody>
+          <a:bodyPr wrap="none" rtlCol="0">
+            <a:spAutoFit/>
+          </a:bodyPr>
+          <a:lstStyle/>
+          <a:p>
+            <a:pPr algn="ctr"/>
+            <a:r>
+              <a:rPr lang="en-US" sz="1000" dirty="0">
+                <a:latin typeface="Times New Roman" panose="02020603050405020304" pitchFamily="18" charset="0"/>
+                <a:cs typeface="Times New Roman" panose="02020603050405020304" pitchFamily="18" charset="0"/>
+              </a:rPr>
+              <a:t>Kinematic Motion </a:t>
+            </a:r>
+          </a:p>
+          <a:p>
+            <a:pPr algn="ctr"/>
+            <a:r>
+              <a:rPr lang="en-US" sz="1000" dirty="0">
+                <a:latin typeface="Times New Roman" panose="02020603050405020304" pitchFamily="18" charset="0"/>
+                <a:cs typeface="Times New Roman" panose="02020603050405020304" pitchFamily="18" charset="0"/>
+              </a:rPr>
+              <a:t>Type</a:t>
+            </a:r>
+          </a:p>
+        </p:txBody>
+      </p:sp>
+      <p:pic>
+        <p:nvPicPr>
+          <p:cNvPr id="46" name="Picture 45">
+            <a:extLst>
+              <a:ext uri="{FF2B5EF4-FFF2-40B4-BE49-F238E27FC236}">
+                <a16:creationId xmlns:a16="http://schemas.microsoft.com/office/drawing/2014/main" id="{D8FEE631-6ED1-BB4B-C291-12166AC5B79A}"/>
+              </a:ext>
+            </a:extLst>
+          </p:cNvPr>
+          <p:cNvPicPr>
+            <a:picLocks noChangeAspect="1"/>
+          </p:cNvPicPr>
+          <p:nvPr/>
+        </p:nvPicPr>
+        <p:blipFill>
+          <a:blip r:embed="rId17"/>
+          <a:stretch>
+            <a:fillRect/>
+          </a:stretch>
+        </p:blipFill>
+        <p:spPr>
+          <a:xfrm>
+            <a:off x="9211398" y="4709422"/>
+            <a:ext cx="304800" cy="161925"/>
+          </a:xfrm>
+          <a:prstGeom prst="rect">
+            <a:avLst/>
+          </a:prstGeom>
+        </p:spPr>
+      </p:pic>
+      <p:pic>
+        <p:nvPicPr>
+          <p:cNvPr id="47" name="Picture 46">
+            <a:extLst>
+              <a:ext uri="{FF2B5EF4-FFF2-40B4-BE49-F238E27FC236}">
+                <a16:creationId xmlns:a16="http://schemas.microsoft.com/office/drawing/2014/main" id="{A51E6D10-F77D-E41D-EDB4-03CC1746656A}"/>
+              </a:ext>
+            </a:extLst>
+          </p:cNvPr>
+          <p:cNvPicPr>
+            <a:picLocks noChangeAspect="1"/>
+          </p:cNvPicPr>
+          <p:nvPr/>
+        </p:nvPicPr>
+        <p:blipFill>
+          <a:blip r:embed="rId18"/>
+          <a:stretch>
+            <a:fillRect/>
+          </a:stretch>
+        </p:blipFill>
+        <p:spPr>
+          <a:xfrm>
+            <a:off x="17088029" y="4735935"/>
+            <a:ext cx="285750" cy="161925"/>
+          </a:xfrm>
+          <a:prstGeom prst="rect">
+            <a:avLst/>
+          </a:prstGeom>
+        </p:spPr>
+      </p:pic>
+      <p:sp>
+        <p:nvSpPr>
+          <p:cNvPr id="96" name="TextBox 95">
+            <a:extLst>
+              <a:ext uri="{FF2B5EF4-FFF2-40B4-BE49-F238E27FC236}">
+                <a16:creationId xmlns:a16="http://schemas.microsoft.com/office/drawing/2014/main" id="{2425E95A-00BE-FC9D-D296-A9A34A7DEFBF}"/>
+              </a:ext>
+            </a:extLst>
+          </p:cNvPr>
+          <p:cNvSpPr txBox="1"/>
+          <p:nvPr/>
+        </p:nvSpPr>
+        <p:spPr>
+          <a:xfrm>
+            <a:off x="9089900" y="4811575"/>
+            <a:ext cx="1300356" cy="246221"/>
+          </a:xfrm>
+          <a:prstGeom prst="rect">
+            <a:avLst/>
+          </a:prstGeom>
+          <a:noFill/>
+        </p:spPr>
+        <p:txBody>
+          <a:bodyPr wrap="none" rtlCol="0">
+            <a:spAutoFit/>
+          </a:bodyPr>
+          <a:lstStyle/>
+          <a:p>
+            <a:r>
+              <a:rPr lang="en-US" sz="1000" dirty="0">
+                <a:latin typeface="Times New Roman" panose="02020603050405020304" pitchFamily="18" charset="0"/>
+                <a:cs typeface="Times New Roman" panose="02020603050405020304" pitchFamily="18" charset="0"/>
+              </a:rPr>
+              <a:t>Surface Property Left</a:t>
+            </a:r>
+          </a:p>
+        </p:txBody>
+      </p:sp>
+      <p:sp>
+        <p:nvSpPr>
+          <p:cNvPr id="99" name="TextBox 98">
+            <a:extLst>
+              <a:ext uri="{FF2B5EF4-FFF2-40B4-BE49-F238E27FC236}">
+                <a16:creationId xmlns:a16="http://schemas.microsoft.com/office/drawing/2014/main" id="{734E44A7-F224-1C54-F0DB-81AC4FB09F14}"/>
+              </a:ext>
+            </a:extLst>
+          </p:cNvPr>
+          <p:cNvSpPr txBox="1"/>
+          <p:nvPr/>
+        </p:nvSpPr>
+        <p:spPr>
+          <a:xfrm>
+            <a:off x="16244053" y="4829795"/>
+            <a:ext cx="1369286" cy="246221"/>
+          </a:xfrm>
+          <a:prstGeom prst="rect">
+            <a:avLst/>
+          </a:prstGeom>
+          <a:noFill/>
+        </p:spPr>
+        <p:txBody>
+          <a:bodyPr wrap="none" rtlCol="0">
+            <a:spAutoFit/>
+          </a:bodyPr>
+          <a:lstStyle/>
+          <a:p>
+            <a:r>
+              <a:rPr lang="en-US" sz="1000" dirty="0">
+                <a:latin typeface="Times New Roman" panose="02020603050405020304" pitchFamily="18" charset="0"/>
+                <a:cs typeface="Times New Roman" panose="02020603050405020304" pitchFamily="18" charset="0"/>
+              </a:rPr>
+              <a:t>Surface Property Right</a:t>
+            </a:r>
+          </a:p>
+        </p:txBody>
+      </p:sp>
+      <p:sp>
+        <p:nvSpPr>
+          <p:cNvPr id="101" name="TextBox 100">
+            <a:extLst>
+              <a:ext uri="{FF2B5EF4-FFF2-40B4-BE49-F238E27FC236}">
+                <a16:creationId xmlns:a16="http://schemas.microsoft.com/office/drawing/2014/main" id="{54E16D3C-3605-0E90-F712-FD73960F5E88}"/>
+              </a:ext>
+            </a:extLst>
+          </p:cNvPr>
+          <p:cNvSpPr txBox="1"/>
+          <p:nvPr/>
+        </p:nvSpPr>
+        <p:spPr>
+          <a:xfrm>
+            <a:off x="10395675" y="5222224"/>
+            <a:ext cx="990977" cy="553998"/>
+          </a:xfrm>
+          <a:prstGeom prst="rect">
+            <a:avLst/>
+          </a:prstGeom>
+          <a:noFill/>
+        </p:spPr>
+        <p:txBody>
+          <a:bodyPr wrap="none" rtlCol="0">
+            <a:spAutoFit/>
+          </a:bodyPr>
+          <a:lstStyle/>
+          <a:p>
+            <a:pPr algn="ctr"/>
+            <a:r>
+              <a:rPr lang="en-US" sz="1000" dirty="0">
+                <a:latin typeface="Times New Roman" panose="02020603050405020304" pitchFamily="18" charset="0"/>
+                <a:cs typeface="Times New Roman" panose="02020603050405020304" pitchFamily="18" charset="0"/>
+              </a:rPr>
+              <a:t>Obstacle </a:t>
+            </a:r>
+          </a:p>
+          <a:p>
+            <a:pPr algn="ctr"/>
+            <a:r>
+              <a:rPr lang="en-US" sz="1000" dirty="0">
+                <a:latin typeface="Times New Roman" panose="02020603050405020304" pitchFamily="18" charset="0"/>
+                <a:cs typeface="Times New Roman" panose="02020603050405020304" pitchFamily="18" charset="0"/>
+              </a:rPr>
+              <a:t>Horizontal</a:t>
+            </a:r>
+          </a:p>
+          <a:p>
+            <a:pPr algn="ctr"/>
+            <a:r>
+              <a:rPr lang="en-US" sz="1000" dirty="0">
+                <a:latin typeface="Times New Roman" panose="02020603050405020304" pitchFamily="18" charset="0"/>
+                <a:cs typeface="Times New Roman" panose="02020603050405020304" pitchFamily="18" charset="0"/>
+              </a:rPr>
+              <a:t>Spatial Position</a:t>
+            </a:r>
+          </a:p>
+        </p:txBody>
+      </p:sp>
+      <p:sp>
+        <p:nvSpPr>
+          <p:cNvPr id="103" name="TextBox 102">
+            <a:extLst>
+              <a:ext uri="{FF2B5EF4-FFF2-40B4-BE49-F238E27FC236}">
+                <a16:creationId xmlns:a16="http://schemas.microsoft.com/office/drawing/2014/main" id="{8AD7B44E-87FF-4339-812B-3276509FFDD9}"/>
+              </a:ext>
+            </a:extLst>
+          </p:cNvPr>
+          <p:cNvSpPr txBox="1"/>
+          <p:nvPr/>
+        </p:nvSpPr>
+        <p:spPr>
+          <a:xfrm>
+            <a:off x="11368679" y="5215226"/>
+            <a:ext cx="1016625" cy="246221"/>
+          </a:xfrm>
+          <a:prstGeom prst="rect">
+            <a:avLst/>
+          </a:prstGeom>
+          <a:noFill/>
+        </p:spPr>
+        <p:txBody>
+          <a:bodyPr wrap="none" rtlCol="0">
+            <a:spAutoFit/>
+          </a:bodyPr>
+          <a:lstStyle/>
+          <a:p>
+            <a:r>
+              <a:rPr lang="en-US" sz="1000" dirty="0">
+                <a:latin typeface="Times New Roman" panose="02020603050405020304" pitchFamily="18" charset="0"/>
+                <a:cs typeface="Times New Roman" panose="02020603050405020304" pitchFamily="18" charset="0"/>
+              </a:rPr>
+              <a:t>Obstacle Height</a:t>
+            </a:r>
+          </a:p>
+        </p:txBody>
+      </p:sp>
+      <p:sp>
+        <p:nvSpPr>
+          <p:cNvPr id="105" name="TextBox 104">
+            <a:extLst>
+              <a:ext uri="{FF2B5EF4-FFF2-40B4-BE49-F238E27FC236}">
+                <a16:creationId xmlns:a16="http://schemas.microsoft.com/office/drawing/2014/main" id="{82B90979-4111-F711-DF2F-ED182A62AB9C}"/>
+              </a:ext>
+            </a:extLst>
+          </p:cNvPr>
+          <p:cNvSpPr txBox="1"/>
+          <p:nvPr/>
+        </p:nvSpPr>
+        <p:spPr>
+          <a:xfrm>
+            <a:off x="12361070" y="5212044"/>
+            <a:ext cx="1215397" cy="400110"/>
+          </a:xfrm>
+          <a:prstGeom prst="rect">
+            <a:avLst/>
+          </a:prstGeom>
+          <a:noFill/>
+        </p:spPr>
+        <p:txBody>
+          <a:bodyPr wrap="none" rtlCol="0">
+            <a:spAutoFit/>
+          </a:bodyPr>
+          <a:lstStyle/>
+          <a:p>
+            <a:pPr algn="ctr"/>
+            <a:r>
+              <a:rPr lang="en-US" sz="1000" dirty="0">
+                <a:latin typeface="Times New Roman" panose="02020603050405020304" pitchFamily="18" charset="0"/>
+                <a:cs typeface="Times New Roman" panose="02020603050405020304" pitchFamily="18" charset="0"/>
+              </a:rPr>
+              <a:t>Arc Apex-Obstacle </a:t>
+            </a:r>
+          </a:p>
+          <a:p>
+            <a:pPr algn="ctr"/>
+            <a:r>
+              <a:rPr lang="en-US" sz="1000" dirty="0">
+                <a:latin typeface="Times New Roman" panose="02020603050405020304" pitchFamily="18" charset="0"/>
+                <a:cs typeface="Times New Roman" panose="02020603050405020304" pitchFamily="18" charset="0"/>
+              </a:rPr>
+              <a:t>Gap</a:t>
+            </a:r>
+          </a:p>
+        </p:txBody>
+      </p:sp>
+      <p:sp>
+        <p:nvSpPr>
+          <p:cNvPr id="107" name="TextBox 106">
+            <a:extLst>
+              <a:ext uri="{FF2B5EF4-FFF2-40B4-BE49-F238E27FC236}">
+                <a16:creationId xmlns:a16="http://schemas.microsoft.com/office/drawing/2014/main" id="{3A9E0749-F37B-5AAA-1BC4-66F62BCBA95E}"/>
+              </a:ext>
+            </a:extLst>
+          </p:cNvPr>
+          <p:cNvSpPr txBox="1"/>
+          <p:nvPr/>
+        </p:nvSpPr>
+        <p:spPr>
+          <a:xfrm>
+            <a:off x="13604732" y="5164914"/>
+            <a:ext cx="736099" cy="400110"/>
+          </a:xfrm>
+          <a:prstGeom prst="rect">
+            <a:avLst/>
+          </a:prstGeom>
+          <a:noFill/>
+        </p:spPr>
+        <p:txBody>
+          <a:bodyPr wrap="none" rtlCol="0">
+            <a:spAutoFit/>
+          </a:bodyPr>
+          <a:lstStyle/>
+          <a:p>
+            <a:pPr algn="ctr"/>
+            <a:r>
+              <a:rPr lang="en-US" sz="1000" dirty="0">
+                <a:latin typeface="Times New Roman" panose="02020603050405020304" pitchFamily="18" charset="0"/>
+                <a:cs typeface="Times New Roman" panose="02020603050405020304" pitchFamily="18" charset="0"/>
+              </a:rPr>
+              <a:t>Final </a:t>
+            </a:r>
+          </a:p>
+          <a:p>
+            <a:pPr algn="ctr"/>
+            <a:r>
+              <a:rPr lang="en-US" sz="1000" dirty="0">
+                <a:latin typeface="Times New Roman" panose="02020603050405020304" pitchFamily="18" charset="0"/>
+                <a:cs typeface="Times New Roman" panose="02020603050405020304" pitchFamily="18" charset="0"/>
+              </a:rPr>
+              <a:t>Adjacency</a:t>
+            </a:r>
+          </a:p>
+        </p:txBody>
+      </p:sp>
+      <p:sp>
+        <p:nvSpPr>
+          <p:cNvPr id="109" name="TextBox 108">
+            <a:extLst>
+              <a:ext uri="{FF2B5EF4-FFF2-40B4-BE49-F238E27FC236}">
+                <a16:creationId xmlns:a16="http://schemas.microsoft.com/office/drawing/2014/main" id="{A383A06B-4A08-E770-7D76-4DE786A26744}"/>
+              </a:ext>
+            </a:extLst>
+          </p:cNvPr>
+          <p:cNvSpPr txBox="1"/>
+          <p:nvPr/>
+        </p:nvSpPr>
+        <p:spPr>
+          <a:xfrm>
+            <a:off x="14458022" y="5201128"/>
+            <a:ext cx="692818" cy="400110"/>
+          </a:xfrm>
+          <a:prstGeom prst="rect">
+            <a:avLst/>
+          </a:prstGeom>
+          <a:noFill/>
+        </p:spPr>
+        <p:txBody>
+          <a:bodyPr wrap="none" rtlCol="0">
+            <a:spAutoFit/>
+          </a:bodyPr>
+          <a:lstStyle/>
+          <a:p>
+            <a:pPr algn="ctr"/>
+            <a:r>
+              <a:rPr lang="en-US" sz="1000" dirty="0">
+                <a:latin typeface="Times New Roman" panose="02020603050405020304" pitchFamily="18" charset="0"/>
+                <a:cs typeface="Times New Roman" panose="02020603050405020304" pitchFamily="18" charset="0"/>
+              </a:rPr>
+              <a:t>Arc Peak </a:t>
+            </a:r>
+          </a:p>
+          <a:p>
+            <a:pPr algn="ctr"/>
+            <a:r>
+              <a:rPr lang="en-US" sz="1000" dirty="0">
+                <a:latin typeface="Times New Roman" panose="02020603050405020304" pitchFamily="18" charset="0"/>
+                <a:cs typeface="Times New Roman" panose="02020603050405020304" pitchFamily="18" charset="0"/>
+              </a:rPr>
+              <a:t>Height</a:t>
+            </a:r>
+          </a:p>
+        </p:txBody>
+      </p:sp>
     </p:spTree>
     <p:extLst>
       <p:ext uri="{BB962C8B-B14F-4D97-AF65-F5344CB8AC3E}">
@@ -8156,82 +8420,6 @@
           <a:chExt cx="0" cy="0"/>
         </a:xfrm>
       </p:grpSpPr>
-      <p:sp>
-        <p:nvSpPr>
-          <p:cNvPr id="15" name="TextBox 14">
-            <a:extLst>
-              <a:ext uri="{FF2B5EF4-FFF2-40B4-BE49-F238E27FC236}">
-                <a16:creationId xmlns:a16="http://schemas.microsoft.com/office/drawing/2014/main" id="{99BCE945-E225-E75E-B2B8-750167ECD484}"/>
-              </a:ext>
-            </a:extLst>
-          </p:cNvPr>
-          <p:cNvSpPr txBox="1"/>
-          <p:nvPr/>
-        </p:nvSpPr>
-        <p:spPr>
-          <a:xfrm>
-            <a:off x="2427560" y="5212044"/>
-            <a:ext cx="931665" cy="246221"/>
-          </a:xfrm>
-          <a:prstGeom prst="rect">
-            <a:avLst/>
-          </a:prstGeom>
-          <a:noFill/>
-        </p:spPr>
-        <p:txBody>
-          <a:bodyPr wrap="none" rtlCol="0">
-            <a:spAutoFit/>
-          </a:bodyPr>
-          <a:lstStyle/>
-          <a:p>
-            <a:r>
-              <a:rPr lang="en-US" sz="1000" dirty="0">
-                <a:latin typeface="Times New Roman" panose="02020603050405020304" pitchFamily="18" charset="0"/>
-                <a:cs typeface="Times New Roman" panose="02020603050405020304" pitchFamily="18" charset="0"/>
-              </a:rPr>
-              <a:t>Barrier Height</a:t>
-            </a:r>
-          </a:p>
-        </p:txBody>
-      </p:sp>
-      <p:sp>
-        <p:nvSpPr>
-          <p:cNvPr id="14" name="TextBox 13">
-            <a:extLst>
-              <a:ext uri="{FF2B5EF4-FFF2-40B4-BE49-F238E27FC236}">
-                <a16:creationId xmlns:a16="http://schemas.microsoft.com/office/drawing/2014/main" id="{CED8133E-270D-F132-1C9D-C170016B38B3}"/>
-              </a:ext>
-            </a:extLst>
-          </p:cNvPr>
-          <p:cNvSpPr txBox="1"/>
-          <p:nvPr/>
-        </p:nvSpPr>
-        <p:spPr>
-          <a:xfrm>
-            <a:off x="1499306" y="5221199"/>
-            <a:ext cx="1000595" cy="246221"/>
-          </a:xfrm>
-          <a:prstGeom prst="rect">
-            <a:avLst/>
-          </a:prstGeom>
-          <a:noFill/>
-        </p:spPr>
-        <p:txBody>
-          <a:bodyPr wrap="none" rtlCol="0">
-            <a:spAutoFit/>
-          </a:bodyPr>
-          <a:lstStyle/>
-          <a:p>
-            <a:r>
-              <a:rPr lang="en-US" sz="1000" dirty="0">
-                <a:latin typeface="Times New Roman" panose="02020603050405020304" pitchFamily="18" charset="0"/>
-                <a:cs typeface="Times New Roman" panose="02020603050405020304" pitchFamily="18" charset="0"/>
-              </a:rPr>
-              <a:t>Barrier Position</a:t>
-            </a:r>
-          </a:p>
-        </p:txBody>
-      </p:sp>
       <p:pic>
         <p:nvPicPr>
           <p:cNvPr id="3" name="Picture 2">
@@ -8284,7 +8472,7 @@
         </p:blipFill>
         <p:spPr>
           <a:xfrm>
-            <a:off x="6827100" y="5028443"/>
+            <a:off x="7009980" y="5062733"/>
             <a:ext cx="1371600" cy="1209675"/>
           </a:xfrm>
           <a:prstGeom prst="rect">
@@ -8412,158 +8600,6 @@
           </a:prstGeom>
         </p:spPr>
       </p:pic>
-      <p:sp>
-        <p:nvSpPr>
-          <p:cNvPr id="16" name="TextBox 15">
-            <a:extLst>
-              <a:ext uri="{FF2B5EF4-FFF2-40B4-BE49-F238E27FC236}">
-                <a16:creationId xmlns:a16="http://schemas.microsoft.com/office/drawing/2014/main" id="{A46B5FC3-2310-34AE-229D-E85323A3CCDC}"/>
-              </a:ext>
-            </a:extLst>
-          </p:cNvPr>
-          <p:cNvSpPr txBox="1"/>
-          <p:nvPr/>
-        </p:nvSpPr>
-        <p:spPr>
-          <a:xfrm>
-            <a:off x="3293608" y="5220941"/>
-            <a:ext cx="1223412" cy="246221"/>
-          </a:xfrm>
-          <a:prstGeom prst="rect">
-            <a:avLst/>
-          </a:prstGeom>
-          <a:noFill/>
-        </p:spPr>
-        <p:txBody>
-          <a:bodyPr wrap="none" rtlCol="0">
-            <a:spAutoFit/>
-          </a:bodyPr>
-          <a:lstStyle/>
-          <a:p>
-            <a:r>
-              <a:rPr lang="en-US" sz="1000" dirty="0">
-                <a:latin typeface="Times New Roman" panose="02020603050405020304" pitchFamily="18" charset="0"/>
-                <a:cs typeface="Times New Roman" panose="02020603050405020304" pitchFamily="18" charset="0"/>
-              </a:rPr>
-              <a:t>Margin of clearance</a:t>
-            </a:r>
-          </a:p>
-        </p:txBody>
-      </p:sp>
-      <p:sp>
-        <p:nvSpPr>
-          <p:cNvPr id="17" name="TextBox 16">
-            <a:extLst>
-              <a:ext uri="{FF2B5EF4-FFF2-40B4-BE49-F238E27FC236}">
-                <a16:creationId xmlns:a16="http://schemas.microsoft.com/office/drawing/2014/main" id="{A2D41E6E-0BC0-48F5-A2D4-FC531E435BDC}"/>
-              </a:ext>
-            </a:extLst>
-          </p:cNvPr>
-          <p:cNvSpPr txBox="1"/>
-          <p:nvPr/>
-        </p:nvSpPr>
-        <p:spPr>
-          <a:xfrm>
-            <a:off x="5068301" y="5242830"/>
-            <a:ext cx="843501" cy="246221"/>
-          </a:xfrm>
-          <a:prstGeom prst="rect">
-            <a:avLst/>
-          </a:prstGeom>
-          <a:noFill/>
-        </p:spPr>
-        <p:txBody>
-          <a:bodyPr wrap="none" rtlCol="0">
-            <a:spAutoFit/>
-          </a:bodyPr>
-          <a:lstStyle/>
-          <a:p>
-            <a:r>
-              <a:rPr lang="en-US" sz="1000" dirty="0">
-                <a:latin typeface="Times New Roman" panose="02020603050405020304" pitchFamily="18" charset="0"/>
-                <a:cs typeface="Times New Roman" panose="02020603050405020304" pitchFamily="18" charset="0"/>
-              </a:rPr>
-              <a:t>Jump Height</a:t>
-            </a:r>
-          </a:p>
-        </p:txBody>
-      </p:sp>
-      <p:sp>
-        <p:nvSpPr>
-          <p:cNvPr id="18" name="TextBox 17">
-            <a:extLst>
-              <a:ext uri="{FF2B5EF4-FFF2-40B4-BE49-F238E27FC236}">
-                <a16:creationId xmlns:a16="http://schemas.microsoft.com/office/drawing/2014/main" id="{57446DA8-FA7F-37FE-B510-E30EF5D413B4}"/>
-              </a:ext>
-            </a:extLst>
-          </p:cNvPr>
-          <p:cNvSpPr txBox="1"/>
-          <p:nvPr/>
-        </p:nvSpPr>
-        <p:spPr>
-          <a:xfrm>
-            <a:off x="5868415" y="5244401"/>
-            <a:ext cx="857927" cy="246221"/>
-          </a:xfrm>
-          <a:prstGeom prst="rect">
-            <a:avLst/>
-          </a:prstGeom>
-          <a:noFill/>
-        </p:spPr>
-        <p:txBody>
-          <a:bodyPr wrap="none" rtlCol="0">
-            <a:spAutoFit/>
-          </a:bodyPr>
-          <a:lstStyle/>
-          <a:p>
-            <a:r>
-              <a:rPr lang="en-US" sz="1000" dirty="0">
-                <a:latin typeface="Times New Roman" panose="02020603050405020304" pitchFamily="18" charset="0"/>
-                <a:cs typeface="Times New Roman" panose="02020603050405020304" pitchFamily="18" charset="0"/>
-              </a:rPr>
-              <a:t>Motion Type</a:t>
-            </a:r>
-          </a:p>
-        </p:txBody>
-      </p:sp>
-      <p:sp>
-        <p:nvSpPr>
-          <p:cNvPr id="19" name="TextBox 18">
-            <a:extLst>
-              <a:ext uri="{FF2B5EF4-FFF2-40B4-BE49-F238E27FC236}">
-                <a16:creationId xmlns:a16="http://schemas.microsoft.com/office/drawing/2014/main" id="{C90E1ECB-BD08-BF85-E25D-6CB2322DABCF}"/>
-              </a:ext>
-            </a:extLst>
-          </p:cNvPr>
-          <p:cNvSpPr txBox="1"/>
-          <p:nvPr/>
-        </p:nvSpPr>
-        <p:spPr>
-          <a:xfrm>
-            <a:off x="4412704" y="5230872"/>
-            <a:ext cx="774571" cy="246221"/>
-          </a:xfrm>
-          <a:prstGeom prst="rect">
-            <a:avLst/>
-          </a:prstGeom>
-          <a:noFill/>
-        </p:spPr>
-        <p:txBody>
-          <a:bodyPr wrap="none" rtlCol="0">
-            <a:spAutoFit/>
-          </a:bodyPr>
-          <a:lstStyle/>
-          <a:p>
-            <a:r>
-              <a:rPr lang="en-US" sz="1000" dirty="0">
-                <a:latin typeface="Times New Roman" panose="02020603050405020304" pitchFamily="18" charset="0"/>
-                <a:cs typeface="Times New Roman" panose="02020603050405020304" pitchFamily="18" charset="0"/>
-              </a:rPr>
-              <a:t>Contiguous</a:t>
-            </a:r>
-          </a:p>
-        </p:txBody>
-      </p:sp>
       <p:pic>
         <p:nvPicPr>
           <p:cNvPr id="21" name="Picture 20">
@@ -8834,44 +8870,6 @@
           </a:prstGeom>
         </p:spPr>
       </p:pic>
-      <p:sp>
-        <p:nvSpPr>
-          <p:cNvPr id="38" name="TextBox 37">
-            <a:extLst>
-              <a:ext uri="{FF2B5EF4-FFF2-40B4-BE49-F238E27FC236}">
-                <a16:creationId xmlns:a16="http://schemas.microsoft.com/office/drawing/2014/main" id="{327952D9-CF84-4E44-0224-663A9D0CE28A}"/>
-              </a:ext>
-            </a:extLst>
-          </p:cNvPr>
-          <p:cNvSpPr txBox="1"/>
-          <p:nvPr/>
-        </p:nvSpPr>
-        <p:spPr>
-          <a:xfrm>
-            <a:off x="2999204" y="5540165"/>
-            <a:ext cx="2553904" cy="246221"/>
-          </a:xfrm>
-          <a:prstGeom prst="rect">
-            <a:avLst/>
-          </a:prstGeom>
-          <a:noFill/>
-        </p:spPr>
-        <p:txBody>
-          <a:bodyPr wrap="none" rtlCol="0">
-            <a:spAutoFit/>
-          </a:bodyPr>
-          <a:lstStyle/>
-          <a:p>
-            <a:r>
-              <a:rPr lang="en-US" sz="1000" dirty="0">
-                <a:latin typeface="Times New Roman" panose="02020603050405020304" pitchFamily="18" charset="0"/>
-                <a:cs typeface="Times New Roman" panose="02020603050405020304" pitchFamily="18" charset="0"/>
-              </a:rPr>
-              <a:t>Position of entity/object on the left at time = 0</a:t>
-            </a:r>
-          </a:p>
-        </p:txBody>
-      </p:sp>
       <p:pic>
         <p:nvPicPr>
           <p:cNvPr id="40" name="Picture 39">
@@ -8992,82 +8990,6 @@
           </a:prstGeom>
         </p:spPr>
       </p:pic>
-      <p:sp>
-        <p:nvSpPr>
-          <p:cNvPr id="51" name="TextBox 50">
-            <a:extLst>
-              <a:ext uri="{FF2B5EF4-FFF2-40B4-BE49-F238E27FC236}">
-                <a16:creationId xmlns:a16="http://schemas.microsoft.com/office/drawing/2014/main" id="{F5F7239C-432A-3ECB-81C4-D91AFFB6478B}"/>
-              </a:ext>
-            </a:extLst>
-          </p:cNvPr>
-          <p:cNvSpPr txBox="1"/>
-          <p:nvPr/>
-        </p:nvSpPr>
-        <p:spPr>
-          <a:xfrm>
-            <a:off x="21831" y="4830044"/>
-            <a:ext cx="1287532" cy="246221"/>
-          </a:xfrm>
-          <a:prstGeom prst="rect">
-            <a:avLst/>
-          </a:prstGeom>
-          <a:noFill/>
-        </p:spPr>
-        <p:txBody>
-          <a:bodyPr wrap="none" rtlCol="0">
-            <a:spAutoFit/>
-          </a:bodyPr>
-          <a:lstStyle/>
-          <a:p>
-            <a:r>
-              <a:rPr lang="en-US" sz="1000" dirty="0">
-                <a:latin typeface="Times New Roman" panose="02020603050405020304" pitchFamily="18" charset="0"/>
-                <a:cs typeface="Times New Roman" panose="02020603050405020304" pitchFamily="18" charset="0"/>
-              </a:rPr>
-              <a:t>Entity/object features</a:t>
-            </a:r>
-          </a:p>
-        </p:txBody>
-      </p:sp>
-      <p:sp>
-        <p:nvSpPr>
-          <p:cNvPr id="52" name="TextBox 51">
-            <a:extLst>
-              <a:ext uri="{FF2B5EF4-FFF2-40B4-BE49-F238E27FC236}">
-                <a16:creationId xmlns:a16="http://schemas.microsoft.com/office/drawing/2014/main" id="{8C9AF6C8-C7D4-5533-8070-66E638134C80}"/>
-              </a:ext>
-            </a:extLst>
-          </p:cNvPr>
-          <p:cNvSpPr txBox="1"/>
-          <p:nvPr/>
-        </p:nvSpPr>
-        <p:spPr>
-          <a:xfrm>
-            <a:off x="7175984" y="4812168"/>
-            <a:ext cx="1287532" cy="246221"/>
-          </a:xfrm>
-          <a:prstGeom prst="rect">
-            <a:avLst/>
-          </a:prstGeom>
-          <a:noFill/>
-        </p:spPr>
-        <p:txBody>
-          <a:bodyPr wrap="none" rtlCol="0">
-            <a:spAutoFit/>
-          </a:bodyPr>
-          <a:lstStyle/>
-          <a:p>
-            <a:r>
-              <a:rPr lang="en-US" sz="1000" dirty="0">
-                <a:latin typeface="Times New Roman" panose="02020603050405020304" pitchFamily="18" charset="0"/>
-                <a:cs typeface="Times New Roman" panose="02020603050405020304" pitchFamily="18" charset="0"/>
-              </a:rPr>
-              <a:t>Entity/object features</a:t>
-            </a:r>
-          </a:p>
-        </p:txBody>
-      </p:sp>
       <p:cxnSp>
         <p:nvCxnSpPr>
           <p:cNvPr id="53" name="Straight Arrow Connector 52">
@@ -9112,44 +9034,6 @@
           </a:fontRef>
         </p:style>
       </p:cxnSp>
-      <p:sp>
-        <p:nvSpPr>
-          <p:cNvPr id="54" name="TextBox 53">
-            <a:extLst>
-              <a:ext uri="{FF2B5EF4-FFF2-40B4-BE49-F238E27FC236}">
-                <a16:creationId xmlns:a16="http://schemas.microsoft.com/office/drawing/2014/main" id="{8D030D4F-3C66-ECC5-51CF-600EC3B670E0}"/>
-              </a:ext>
-            </a:extLst>
-          </p:cNvPr>
-          <p:cNvSpPr txBox="1"/>
-          <p:nvPr/>
-        </p:nvSpPr>
-        <p:spPr>
-          <a:xfrm>
-            <a:off x="1602203" y="4640800"/>
-            <a:ext cx="596638" cy="246221"/>
-          </a:xfrm>
-          <a:prstGeom prst="rect">
-            <a:avLst/>
-          </a:prstGeom>
-          <a:noFill/>
-        </p:spPr>
-        <p:txBody>
-          <a:bodyPr wrap="none" rtlCol="0">
-            <a:spAutoFit/>
-          </a:bodyPr>
-          <a:lstStyle/>
-          <a:p>
-            <a:r>
-              <a:rPr lang="en-US" sz="1000" dirty="0">
-                <a:latin typeface="Times New Roman" panose="02020603050405020304" pitchFamily="18" charset="0"/>
-                <a:cs typeface="Times New Roman" panose="02020603050405020304" pitchFamily="18" charset="0"/>
-              </a:rPr>
-              <a:t>Missing</a:t>
-            </a:r>
-          </a:p>
-        </p:txBody>
-      </p:sp>
       <p:cxnSp>
         <p:nvCxnSpPr>
           <p:cNvPr id="55" name="Straight Arrow Connector 54">
@@ -9194,82 +9078,6 @@
           </a:fontRef>
         </p:style>
       </p:cxnSp>
-      <p:sp>
-        <p:nvSpPr>
-          <p:cNvPr id="56" name="TextBox 55">
-            <a:extLst>
-              <a:ext uri="{FF2B5EF4-FFF2-40B4-BE49-F238E27FC236}">
-                <a16:creationId xmlns:a16="http://schemas.microsoft.com/office/drawing/2014/main" id="{1C9666BE-08B8-4741-867E-BA3B72E95141}"/>
-              </a:ext>
-            </a:extLst>
-          </p:cNvPr>
-          <p:cNvSpPr txBox="1"/>
-          <p:nvPr/>
-        </p:nvSpPr>
-        <p:spPr>
-          <a:xfrm>
-            <a:off x="2263195" y="4672988"/>
-            <a:ext cx="723275" cy="246221"/>
-          </a:xfrm>
-          <a:prstGeom prst="rect">
-            <a:avLst/>
-          </a:prstGeom>
-          <a:noFill/>
-        </p:spPr>
-        <p:txBody>
-          <a:bodyPr wrap="none" rtlCol="0">
-            <a:spAutoFit/>
-          </a:bodyPr>
-          <a:lstStyle/>
-          <a:p>
-            <a:r>
-              <a:rPr lang="en-US" sz="1000" dirty="0">
-                <a:latin typeface="Times New Roman" panose="02020603050405020304" pitchFamily="18" charset="0"/>
-                <a:cs typeface="Times New Roman" panose="02020603050405020304" pitchFamily="18" charset="0"/>
-              </a:rPr>
-              <a:t>No Height</a:t>
-            </a:r>
-          </a:p>
-        </p:txBody>
-      </p:sp>
-      <p:sp>
-        <p:nvSpPr>
-          <p:cNvPr id="57" name="TextBox 56">
-            <a:extLst>
-              <a:ext uri="{FF2B5EF4-FFF2-40B4-BE49-F238E27FC236}">
-                <a16:creationId xmlns:a16="http://schemas.microsoft.com/office/drawing/2014/main" id="{4D0968DD-AF2A-4498-5551-2BB540C72FEC}"/>
-              </a:ext>
-            </a:extLst>
-          </p:cNvPr>
-          <p:cNvSpPr txBox="1"/>
-          <p:nvPr/>
-        </p:nvSpPr>
-        <p:spPr>
-          <a:xfrm>
-            <a:off x="3509822" y="4655643"/>
-            <a:ext cx="889987" cy="246221"/>
-          </a:xfrm>
-          <a:prstGeom prst="rect">
-            <a:avLst/>
-          </a:prstGeom>
-          <a:noFill/>
-        </p:spPr>
-        <p:txBody>
-          <a:bodyPr wrap="none" rtlCol="0">
-            <a:spAutoFit/>
-          </a:bodyPr>
-          <a:lstStyle/>
-          <a:p>
-            <a:r>
-              <a:rPr lang="en-US" sz="1000" dirty="0">
-                <a:latin typeface="Times New Roman" panose="02020603050405020304" pitchFamily="18" charset="0"/>
-                <a:cs typeface="Times New Roman" panose="02020603050405020304" pitchFamily="18" charset="0"/>
-              </a:rPr>
-              <a:t>No Clearance</a:t>
-            </a:r>
-          </a:p>
-        </p:txBody>
-      </p:sp>
       <p:cxnSp>
         <p:nvCxnSpPr>
           <p:cNvPr id="58" name="Straight Arrow Connector 57">
@@ -9358,82 +9166,6 @@
           </a:fontRef>
         </p:style>
       </p:cxnSp>
-      <p:sp>
-        <p:nvSpPr>
-          <p:cNvPr id="60" name="TextBox 59">
-            <a:extLst>
-              <a:ext uri="{FF2B5EF4-FFF2-40B4-BE49-F238E27FC236}">
-                <a16:creationId xmlns:a16="http://schemas.microsoft.com/office/drawing/2014/main" id="{E1CEDF0F-868C-EBA4-5B69-17AD67F7A9B0}"/>
-              </a:ext>
-            </a:extLst>
-          </p:cNvPr>
-          <p:cNvSpPr txBox="1"/>
-          <p:nvPr/>
-        </p:nvSpPr>
-        <p:spPr>
-          <a:xfrm>
-            <a:off x="5244018" y="4639427"/>
-            <a:ext cx="939681" cy="246221"/>
-          </a:xfrm>
-          <a:prstGeom prst="rect">
-            <a:avLst/>
-          </a:prstGeom>
-          <a:noFill/>
-        </p:spPr>
-        <p:txBody>
-          <a:bodyPr wrap="none" rtlCol="0">
-            <a:spAutoFit/>
-          </a:bodyPr>
-          <a:lstStyle/>
-          <a:p>
-            <a:r>
-              <a:rPr lang="en-US" sz="1000" dirty="0">
-                <a:latin typeface="Times New Roman" panose="02020603050405020304" pitchFamily="18" charset="0"/>
-                <a:cs typeface="Times New Roman" panose="02020603050405020304" pitchFamily="18" charset="0"/>
-              </a:rPr>
-              <a:t>Jump Height 4</a:t>
-            </a:r>
-          </a:p>
-        </p:txBody>
-      </p:sp>
-      <p:sp>
-        <p:nvSpPr>
-          <p:cNvPr id="61" name="TextBox 60">
-            <a:extLst>
-              <a:ext uri="{FF2B5EF4-FFF2-40B4-BE49-F238E27FC236}">
-                <a16:creationId xmlns:a16="http://schemas.microsoft.com/office/drawing/2014/main" id="{5CD54596-EAA3-6A8C-E8A6-BB0DB8161598}"/>
-              </a:ext>
-            </a:extLst>
-          </p:cNvPr>
-          <p:cNvSpPr txBox="1"/>
-          <p:nvPr/>
-        </p:nvSpPr>
-        <p:spPr>
-          <a:xfrm>
-            <a:off x="6084969" y="4650789"/>
-            <a:ext cx="971741" cy="246221"/>
-          </a:xfrm>
-          <a:prstGeom prst="rect">
-            <a:avLst/>
-          </a:prstGeom>
-          <a:noFill/>
-        </p:spPr>
-        <p:txBody>
-          <a:bodyPr wrap="none" rtlCol="0">
-            <a:spAutoFit/>
-          </a:bodyPr>
-          <a:lstStyle/>
-          <a:p>
-            <a:r>
-              <a:rPr lang="en-US" sz="1000" dirty="0">
-                <a:latin typeface="Times New Roman" panose="02020603050405020304" pitchFamily="18" charset="0"/>
-                <a:cs typeface="Times New Roman" panose="02020603050405020304" pitchFamily="18" charset="0"/>
-              </a:rPr>
-              <a:t>Curved Motion</a:t>
-            </a:r>
-          </a:p>
-        </p:txBody>
-      </p:sp>
       <p:cxnSp>
         <p:nvCxnSpPr>
           <p:cNvPr id="62" name="Straight Arrow Connector 61">
@@ -9590,7 +9322,7 @@
         </p:blipFill>
         <p:spPr>
           <a:xfrm>
-            <a:off x="15978645" y="5052267"/>
+            <a:off x="16230105" y="5063697"/>
             <a:ext cx="1371600" cy="1181100"/>
           </a:xfrm>
           <a:prstGeom prst="rect">
@@ -9598,234 +9330,6 @@
           </a:prstGeom>
         </p:spPr>
       </p:pic>
-      <p:sp>
-        <p:nvSpPr>
-          <p:cNvPr id="71" name="TextBox 70">
-            <a:extLst>
-              <a:ext uri="{FF2B5EF4-FFF2-40B4-BE49-F238E27FC236}">
-                <a16:creationId xmlns:a16="http://schemas.microsoft.com/office/drawing/2014/main" id="{E613A7BB-6548-080D-B00A-9CAFB2AA17F9}"/>
-              </a:ext>
-            </a:extLst>
-          </p:cNvPr>
-          <p:cNvSpPr txBox="1"/>
-          <p:nvPr/>
-        </p:nvSpPr>
-        <p:spPr>
-          <a:xfrm>
-            <a:off x="10489200" y="5265455"/>
-            <a:ext cx="1000595" cy="246221"/>
-          </a:xfrm>
-          <a:prstGeom prst="rect">
-            <a:avLst/>
-          </a:prstGeom>
-          <a:noFill/>
-        </p:spPr>
-        <p:txBody>
-          <a:bodyPr wrap="none" rtlCol="0">
-            <a:spAutoFit/>
-          </a:bodyPr>
-          <a:lstStyle/>
-          <a:p>
-            <a:r>
-              <a:rPr lang="en-US" sz="1000" dirty="0">
-                <a:latin typeface="Times New Roman" panose="02020603050405020304" pitchFamily="18" charset="0"/>
-                <a:cs typeface="Times New Roman" panose="02020603050405020304" pitchFamily="18" charset="0"/>
-              </a:rPr>
-              <a:t>Barrier Position</a:t>
-            </a:r>
-          </a:p>
-        </p:txBody>
-      </p:sp>
-      <p:sp>
-        <p:nvSpPr>
-          <p:cNvPr id="72" name="TextBox 71">
-            <a:extLst>
-              <a:ext uri="{FF2B5EF4-FFF2-40B4-BE49-F238E27FC236}">
-                <a16:creationId xmlns:a16="http://schemas.microsoft.com/office/drawing/2014/main" id="{C52F819D-3FD5-F5A8-5E7E-96F99F4FB9D9}"/>
-              </a:ext>
-            </a:extLst>
-          </p:cNvPr>
-          <p:cNvSpPr txBox="1"/>
-          <p:nvPr/>
-        </p:nvSpPr>
-        <p:spPr>
-          <a:xfrm>
-            <a:off x="11417454" y="5256300"/>
-            <a:ext cx="931665" cy="246221"/>
-          </a:xfrm>
-          <a:prstGeom prst="rect">
-            <a:avLst/>
-          </a:prstGeom>
-          <a:noFill/>
-        </p:spPr>
-        <p:txBody>
-          <a:bodyPr wrap="none" rtlCol="0">
-            <a:spAutoFit/>
-          </a:bodyPr>
-          <a:lstStyle/>
-          <a:p>
-            <a:r>
-              <a:rPr lang="en-US" sz="1000" dirty="0">
-                <a:latin typeface="Times New Roman" panose="02020603050405020304" pitchFamily="18" charset="0"/>
-                <a:cs typeface="Times New Roman" panose="02020603050405020304" pitchFamily="18" charset="0"/>
-              </a:rPr>
-              <a:t>Barrier Height</a:t>
-            </a:r>
-          </a:p>
-        </p:txBody>
-      </p:sp>
-      <p:sp>
-        <p:nvSpPr>
-          <p:cNvPr id="73" name="TextBox 72">
-            <a:extLst>
-              <a:ext uri="{FF2B5EF4-FFF2-40B4-BE49-F238E27FC236}">
-                <a16:creationId xmlns:a16="http://schemas.microsoft.com/office/drawing/2014/main" id="{A29B7DA9-E944-DF5C-2282-A39A0C65F2C6}"/>
-              </a:ext>
-            </a:extLst>
-          </p:cNvPr>
-          <p:cNvSpPr txBox="1"/>
-          <p:nvPr/>
-        </p:nvSpPr>
-        <p:spPr>
-          <a:xfrm>
-            <a:off x="12409232" y="5265197"/>
-            <a:ext cx="1223412" cy="246221"/>
-          </a:xfrm>
-          <a:prstGeom prst="rect">
-            <a:avLst/>
-          </a:prstGeom>
-          <a:noFill/>
-        </p:spPr>
-        <p:txBody>
-          <a:bodyPr wrap="none" rtlCol="0">
-            <a:spAutoFit/>
-          </a:bodyPr>
-          <a:lstStyle/>
-          <a:p>
-            <a:r>
-              <a:rPr lang="en-US" sz="1000" dirty="0">
-                <a:latin typeface="Times New Roman" panose="02020603050405020304" pitchFamily="18" charset="0"/>
-                <a:cs typeface="Times New Roman" panose="02020603050405020304" pitchFamily="18" charset="0"/>
-              </a:rPr>
-              <a:t>Margin of clearance</a:t>
-            </a:r>
-          </a:p>
-        </p:txBody>
-      </p:sp>
-      <p:sp>
-        <p:nvSpPr>
-          <p:cNvPr id="74" name="TextBox 73">
-            <a:extLst>
-              <a:ext uri="{FF2B5EF4-FFF2-40B4-BE49-F238E27FC236}">
-                <a16:creationId xmlns:a16="http://schemas.microsoft.com/office/drawing/2014/main" id="{20463217-824F-53C5-FA25-5492E08A58D2}"/>
-              </a:ext>
-            </a:extLst>
-          </p:cNvPr>
-          <p:cNvSpPr txBox="1"/>
-          <p:nvPr/>
-        </p:nvSpPr>
-        <p:spPr>
-          <a:xfrm>
-            <a:off x="14340831" y="5297890"/>
-            <a:ext cx="843501" cy="246221"/>
-          </a:xfrm>
-          <a:prstGeom prst="rect">
-            <a:avLst/>
-          </a:prstGeom>
-          <a:noFill/>
-        </p:spPr>
-        <p:txBody>
-          <a:bodyPr wrap="none" rtlCol="0">
-            <a:spAutoFit/>
-          </a:bodyPr>
-          <a:lstStyle/>
-          <a:p>
-            <a:r>
-              <a:rPr lang="en-US" sz="1000" dirty="0">
-                <a:latin typeface="Times New Roman" panose="02020603050405020304" pitchFamily="18" charset="0"/>
-                <a:cs typeface="Times New Roman" panose="02020603050405020304" pitchFamily="18" charset="0"/>
-              </a:rPr>
-              <a:t>Jump Height</a:t>
-            </a:r>
-          </a:p>
-        </p:txBody>
-      </p:sp>
-      <p:sp>
-        <p:nvSpPr>
-          <p:cNvPr id="75" name="TextBox 74">
-            <a:extLst>
-              <a:ext uri="{FF2B5EF4-FFF2-40B4-BE49-F238E27FC236}">
-                <a16:creationId xmlns:a16="http://schemas.microsoft.com/office/drawing/2014/main" id="{635CADB5-5DA0-61CF-4A3E-B18A628B8254}"/>
-              </a:ext>
-            </a:extLst>
-          </p:cNvPr>
-          <p:cNvSpPr txBox="1"/>
-          <p:nvPr/>
-        </p:nvSpPr>
-        <p:spPr>
-          <a:xfrm>
-            <a:off x="15190475" y="5298449"/>
-            <a:ext cx="857927" cy="246221"/>
-          </a:xfrm>
-          <a:prstGeom prst="rect">
-            <a:avLst/>
-          </a:prstGeom>
-          <a:noFill/>
-        </p:spPr>
-        <p:txBody>
-          <a:bodyPr wrap="none" rtlCol="0">
-            <a:spAutoFit/>
-          </a:bodyPr>
-          <a:lstStyle/>
-          <a:p>
-            <a:r>
-              <a:rPr lang="en-US" sz="1000" dirty="0">
-                <a:latin typeface="Times New Roman" panose="02020603050405020304" pitchFamily="18" charset="0"/>
-                <a:cs typeface="Times New Roman" panose="02020603050405020304" pitchFamily="18" charset="0"/>
-              </a:rPr>
-              <a:t>Motion Type</a:t>
-            </a:r>
-          </a:p>
-        </p:txBody>
-      </p:sp>
-      <p:sp>
-        <p:nvSpPr>
-          <p:cNvPr id="76" name="TextBox 75">
-            <a:extLst>
-              <a:ext uri="{FF2B5EF4-FFF2-40B4-BE49-F238E27FC236}">
-                <a16:creationId xmlns:a16="http://schemas.microsoft.com/office/drawing/2014/main" id="{7960EFB5-F6E5-C405-6EA4-2775E89D75B2}"/>
-              </a:ext>
-            </a:extLst>
-          </p:cNvPr>
-          <p:cNvSpPr txBox="1"/>
-          <p:nvPr/>
-        </p:nvSpPr>
-        <p:spPr>
-          <a:xfrm>
-            <a:off x="13596908" y="5275128"/>
-            <a:ext cx="774571" cy="246221"/>
-          </a:xfrm>
-          <a:prstGeom prst="rect">
-            <a:avLst/>
-          </a:prstGeom>
-          <a:noFill/>
-        </p:spPr>
-        <p:txBody>
-          <a:bodyPr wrap="none" rtlCol="0">
-            <a:spAutoFit/>
-          </a:bodyPr>
-          <a:lstStyle/>
-          <a:p>
-            <a:r>
-              <a:rPr lang="en-US" sz="1000" dirty="0">
-                <a:latin typeface="Times New Roman" panose="02020603050405020304" pitchFamily="18" charset="0"/>
-                <a:cs typeface="Times New Roman" panose="02020603050405020304" pitchFamily="18" charset="0"/>
-              </a:rPr>
-              <a:t>Contiguous</a:t>
-            </a:r>
-          </a:p>
-        </p:txBody>
-      </p:sp>
       <p:pic>
         <p:nvPicPr>
           <p:cNvPr id="78" name="Picture 77">
@@ -10050,44 +9554,6 @@
           </a:fontRef>
         </p:style>
       </p:cxnSp>
-      <p:sp>
-        <p:nvSpPr>
-          <p:cNvPr id="90" name="TextBox 89">
-            <a:extLst>
-              <a:ext uri="{FF2B5EF4-FFF2-40B4-BE49-F238E27FC236}">
-                <a16:creationId xmlns:a16="http://schemas.microsoft.com/office/drawing/2014/main" id="{33E33A68-8E0A-7D56-02C2-7BD4ABEA4221}"/>
-              </a:ext>
-            </a:extLst>
-          </p:cNvPr>
-          <p:cNvSpPr txBox="1"/>
-          <p:nvPr/>
-        </p:nvSpPr>
-        <p:spPr>
-          <a:xfrm>
-            <a:off x="10482311" y="4697280"/>
-            <a:ext cx="596638" cy="246221"/>
-          </a:xfrm>
-          <a:prstGeom prst="rect">
-            <a:avLst/>
-          </a:prstGeom>
-          <a:noFill/>
-        </p:spPr>
-        <p:txBody>
-          <a:bodyPr wrap="none" rtlCol="0">
-            <a:spAutoFit/>
-          </a:bodyPr>
-          <a:lstStyle/>
-          <a:p>
-            <a:r>
-              <a:rPr lang="en-US" sz="1000" dirty="0">
-                <a:latin typeface="Times New Roman" panose="02020603050405020304" pitchFamily="18" charset="0"/>
-                <a:cs typeface="Times New Roman" panose="02020603050405020304" pitchFamily="18" charset="0"/>
-              </a:rPr>
-              <a:t>Missing</a:t>
-            </a:r>
-          </a:p>
-        </p:txBody>
-      </p:sp>
       <p:cxnSp>
         <p:nvCxnSpPr>
           <p:cNvPr id="91" name="Straight Arrow Connector 90">
@@ -10132,82 +9598,6 @@
           </a:fontRef>
         </p:style>
       </p:cxnSp>
-      <p:sp>
-        <p:nvSpPr>
-          <p:cNvPr id="92" name="TextBox 91">
-            <a:extLst>
-              <a:ext uri="{FF2B5EF4-FFF2-40B4-BE49-F238E27FC236}">
-                <a16:creationId xmlns:a16="http://schemas.microsoft.com/office/drawing/2014/main" id="{577101D2-4562-D69D-D89F-3332C4BCCA8C}"/>
-              </a:ext>
-            </a:extLst>
-          </p:cNvPr>
-          <p:cNvSpPr txBox="1"/>
-          <p:nvPr/>
-        </p:nvSpPr>
-        <p:spPr>
-          <a:xfrm>
-            <a:off x="11263620" y="4729468"/>
-            <a:ext cx="723275" cy="246221"/>
-          </a:xfrm>
-          <a:prstGeom prst="rect">
-            <a:avLst/>
-          </a:prstGeom>
-          <a:noFill/>
-        </p:spPr>
-        <p:txBody>
-          <a:bodyPr wrap="none" rtlCol="0">
-            <a:spAutoFit/>
-          </a:bodyPr>
-          <a:lstStyle/>
-          <a:p>
-            <a:r>
-              <a:rPr lang="en-US" sz="1000" dirty="0">
-                <a:latin typeface="Times New Roman" panose="02020603050405020304" pitchFamily="18" charset="0"/>
-                <a:cs typeface="Times New Roman" panose="02020603050405020304" pitchFamily="18" charset="0"/>
-              </a:rPr>
-              <a:t>No Height</a:t>
-            </a:r>
-          </a:p>
-        </p:txBody>
-      </p:sp>
-      <p:sp>
-        <p:nvSpPr>
-          <p:cNvPr id="93" name="TextBox 92">
-            <a:extLst>
-              <a:ext uri="{FF2B5EF4-FFF2-40B4-BE49-F238E27FC236}">
-                <a16:creationId xmlns:a16="http://schemas.microsoft.com/office/drawing/2014/main" id="{B0E05D74-E567-5404-2EED-697FAD187376}"/>
-              </a:ext>
-            </a:extLst>
-          </p:cNvPr>
-          <p:cNvSpPr txBox="1"/>
-          <p:nvPr/>
-        </p:nvSpPr>
-        <p:spPr>
-          <a:xfrm>
-            <a:off x="12389930" y="4712123"/>
-            <a:ext cx="889987" cy="246221"/>
-          </a:xfrm>
-          <a:prstGeom prst="rect">
-            <a:avLst/>
-          </a:prstGeom>
-          <a:noFill/>
-        </p:spPr>
-        <p:txBody>
-          <a:bodyPr wrap="none" rtlCol="0">
-            <a:spAutoFit/>
-          </a:bodyPr>
-          <a:lstStyle/>
-          <a:p>
-            <a:r>
-              <a:rPr lang="en-US" sz="1000" dirty="0">
-                <a:latin typeface="Times New Roman" panose="02020603050405020304" pitchFamily="18" charset="0"/>
-                <a:cs typeface="Times New Roman" panose="02020603050405020304" pitchFamily="18" charset="0"/>
-              </a:rPr>
-              <a:t>No Clearance</a:t>
-            </a:r>
-          </a:p>
-        </p:txBody>
-      </p:sp>
       <p:cxnSp>
         <p:nvCxnSpPr>
           <p:cNvPr id="94" name="Straight Arrow Connector 93">
@@ -10296,82 +9686,6 @@
           </a:fontRef>
         </p:style>
       </p:cxnSp>
-      <p:sp>
-        <p:nvSpPr>
-          <p:cNvPr id="96" name="TextBox 95">
-            <a:extLst>
-              <a:ext uri="{FF2B5EF4-FFF2-40B4-BE49-F238E27FC236}">
-                <a16:creationId xmlns:a16="http://schemas.microsoft.com/office/drawing/2014/main" id="{71B309C5-E7BF-FCC4-D205-786042E306AD}"/>
-              </a:ext>
-            </a:extLst>
-          </p:cNvPr>
-          <p:cNvSpPr txBox="1"/>
-          <p:nvPr/>
-        </p:nvSpPr>
-        <p:spPr>
-          <a:xfrm>
-            <a:off x="14124126" y="4695907"/>
-            <a:ext cx="723275" cy="246221"/>
-          </a:xfrm>
-          <a:prstGeom prst="rect">
-            <a:avLst/>
-          </a:prstGeom>
-          <a:noFill/>
-        </p:spPr>
-        <p:txBody>
-          <a:bodyPr wrap="none" rtlCol="0">
-            <a:spAutoFit/>
-          </a:bodyPr>
-          <a:lstStyle/>
-          <a:p>
-            <a:r>
-              <a:rPr lang="en-US" sz="1000" dirty="0">
-                <a:latin typeface="Times New Roman" panose="02020603050405020304" pitchFamily="18" charset="0"/>
-                <a:cs typeface="Times New Roman" panose="02020603050405020304" pitchFamily="18" charset="0"/>
-              </a:rPr>
-              <a:t>No Height</a:t>
-            </a:r>
-          </a:p>
-        </p:txBody>
-      </p:sp>
-      <p:sp>
-        <p:nvSpPr>
-          <p:cNvPr id="97" name="TextBox 96">
-            <a:extLst>
-              <a:ext uri="{FF2B5EF4-FFF2-40B4-BE49-F238E27FC236}">
-                <a16:creationId xmlns:a16="http://schemas.microsoft.com/office/drawing/2014/main" id="{1325A368-7A7A-A041-5E67-93EDBC4B21A0}"/>
-              </a:ext>
-            </a:extLst>
-          </p:cNvPr>
-          <p:cNvSpPr txBox="1"/>
-          <p:nvPr/>
-        </p:nvSpPr>
-        <p:spPr>
-          <a:xfrm>
-            <a:off x="15037269" y="4683205"/>
-            <a:ext cx="998991" cy="246221"/>
-          </a:xfrm>
-          <a:prstGeom prst="rect">
-            <a:avLst/>
-          </a:prstGeom>
-          <a:noFill/>
-        </p:spPr>
-        <p:txBody>
-          <a:bodyPr wrap="none" rtlCol="0">
-            <a:spAutoFit/>
-          </a:bodyPr>
-          <a:lstStyle/>
-          <a:p>
-            <a:r>
-              <a:rPr lang="en-US" sz="1000" dirty="0">
-                <a:latin typeface="Times New Roman" panose="02020603050405020304" pitchFamily="18" charset="0"/>
-                <a:cs typeface="Times New Roman" panose="02020603050405020304" pitchFamily="18" charset="0"/>
-              </a:rPr>
-              <a:t>Straight Motion</a:t>
-            </a:r>
-          </a:p>
-        </p:txBody>
-      </p:sp>
       <p:cxnSp>
         <p:nvCxnSpPr>
           <p:cNvPr id="98" name="Straight Arrow Connector 97">
@@ -10806,44 +10120,6 @@
           </a:prstGeom>
         </p:spPr>
       </p:pic>
-      <p:sp>
-        <p:nvSpPr>
-          <p:cNvPr id="125" name="TextBox 124">
-            <a:extLst>
-              <a:ext uri="{FF2B5EF4-FFF2-40B4-BE49-F238E27FC236}">
-                <a16:creationId xmlns:a16="http://schemas.microsoft.com/office/drawing/2014/main" id="{90F8520E-2CB2-B72A-986F-396D51649306}"/>
-              </a:ext>
-            </a:extLst>
-          </p:cNvPr>
-          <p:cNvSpPr txBox="1"/>
-          <p:nvPr/>
-        </p:nvSpPr>
-        <p:spPr>
-          <a:xfrm>
-            <a:off x="8993936" y="4778155"/>
-            <a:ext cx="1287532" cy="246221"/>
-          </a:xfrm>
-          <a:prstGeom prst="rect">
-            <a:avLst/>
-          </a:prstGeom>
-          <a:noFill/>
-        </p:spPr>
-        <p:txBody>
-          <a:bodyPr wrap="none" rtlCol="0">
-            <a:spAutoFit/>
-          </a:bodyPr>
-          <a:lstStyle/>
-          <a:p>
-            <a:r>
-              <a:rPr lang="en-US" sz="1000" dirty="0">
-                <a:latin typeface="Times New Roman" panose="02020603050405020304" pitchFamily="18" charset="0"/>
-                <a:cs typeface="Times New Roman" panose="02020603050405020304" pitchFamily="18" charset="0"/>
-              </a:rPr>
-              <a:t>Entity/object features</a:t>
-            </a:r>
-          </a:p>
-        </p:txBody>
-      </p:sp>
       <p:pic>
         <p:nvPicPr>
           <p:cNvPr id="127" name="Picture 126">
@@ -10876,44 +10152,6 @@
       </p:pic>
       <p:sp>
         <p:nvSpPr>
-          <p:cNvPr id="128" name="TextBox 127">
-            <a:extLst>
-              <a:ext uri="{FF2B5EF4-FFF2-40B4-BE49-F238E27FC236}">
-                <a16:creationId xmlns:a16="http://schemas.microsoft.com/office/drawing/2014/main" id="{7BB27037-DE91-309C-BFBF-3415F716712A}"/>
-              </a:ext>
-            </a:extLst>
-          </p:cNvPr>
-          <p:cNvSpPr txBox="1"/>
-          <p:nvPr/>
-        </p:nvSpPr>
-        <p:spPr>
-          <a:xfrm>
-            <a:off x="16169857" y="4823201"/>
-            <a:ext cx="1287532" cy="246221"/>
-          </a:xfrm>
-          <a:prstGeom prst="rect">
-            <a:avLst/>
-          </a:prstGeom>
-          <a:noFill/>
-        </p:spPr>
-        <p:txBody>
-          <a:bodyPr wrap="none" rtlCol="0">
-            <a:spAutoFit/>
-          </a:bodyPr>
-          <a:lstStyle/>
-          <a:p>
-            <a:r>
-              <a:rPr lang="en-US" sz="1000" dirty="0">
-                <a:latin typeface="Times New Roman" panose="02020603050405020304" pitchFamily="18" charset="0"/>
-                <a:cs typeface="Times New Roman" panose="02020603050405020304" pitchFamily="18" charset="0"/>
-              </a:rPr>
-              <a:t>Entity/object features</a:t>
-            </a:r>
-          </a:p>
-        </p:txBody>
-      </p:sp>
-      <p:sp>
-        <p:nvSpPr>
           <p:cNvPr id="129" name="Rectangle 128">
             <a:extLst>
               <a:ext uri="{FF2B5EF4-FFF2-40B4-BE49-F238E27FC236}">
@@ -10974,7 +10212,7 @@
         <p:spPr>
           <a:xfrm>
             <a:off x="9014911" y="4596444"/>
-            <a:ext cx="8430623" cy="1977390"/>
+            <a:ext cx="8842500" cy="1977390"/>
           </a:xfrm>
           <a:prstGeom prst="rect">
             <a:avLst/>
@@ -11473,9 +10711,8 @@
             <a:avLst/>
           </a:prstGeom>
           <a:solidFill>
-            <a:schemeClr val="accent4">
-              <a:lumMod val="20000"/>
-              <a:lumOff val="80000"/>
+            <a:schemeClr val="bg2">
+              <a:lumMod val="90000"/>
             </a:schemeClr>
           </a:solidFill>
         </p:spPr>
@@ -11516,9 +10753,8 @@
             <a:avLst/>
           </a:prstGeom>
           <a:solidFill>
-            <a:schemeClr val="accent4">
-              <a:lumMod val="20000"/>
-              <a:lumOff val="80000"/>
+            <a:schemeClr val="bg2">
+              <a:lumMod val="90000"/>
             </a:schemeClr>
           </a:solidFill>
         </p:spPr>
@@ -11598,6 +10834,1366 @@
           </a:prstGeom>
         </p:spPr>
       </p:pic>
+      <p:sp>
+        <p:nvSpPr>
+          <p:cNvPr id="175" name="TextBox 174">
+            <a:extLst>
+              <a:ext uri="{FF2B5EF4-FFF2-40B4-BE49-F238E27FC236}">
+                <a16:creationId xmlns:a16="http://schemas.microsoft.com/office/drawing/2014/main" id="{2BB686C0-C65A-3D44-45C1-E8B5DA7C4E50}"/>
+              </a:ext>
+            </a:extLst>
+          </p:cNvPr>
+          <p:cNvSpPr txBox="1"/>
+          <p:nvPr/>
+        </p:nvSpPr>
+        <p:spPr>
+          <a:xfrm>
+            <a:off x="1430726" y="5221199"/>
+            <a:ext cx="990977" cy="553998"/>
+          </a:xfrm>
+          <a:prstGeom prst="rect">
+            <a:avLst/>
+          </a:prstGeom>
+          <a:noFill/>
+        </p:spPr>
+        <p:txBody>
+          <a:bodyPr wrap="none" rtlCol="0">
+            <a:spAutoFit/>
+          </a:bodyPr>
+          <a:lstStyle/>
+          <a:p>
+            <a:pPr algn="ctr"/>
+            <a:r>
+              <a:rPr lang="en-US" sz="1000" dirty="0">
+                <a:latin typeface="Times New Roman" panose="02020603050405020304" pitchFamily="18" charset="0"/>
+                <a:cs typeface="Times New Roman" panose="02020603050405020304" pitchFamily="18" charset="0"/>
+              </a:rPr>
+              <a:t>Obstacle </a:t>
+            </a:r>
+          </a:p>
+          <a:p>
+            <a:pPr algn="ctr"/>
+            <a:r>
+              <a:rPr lang="en-US" sz="1000" dirty="0">
+                <a:latin typeface="Times New Roman" panose="02020603050405020304" pitchFamily="18" charset="0"/>
+                <a:cs typeface="Times New Roman" panose="02020603050405020304" pitchFamily="18" charset="0"/>
+              </a:rPr>
+              <a:t>Horizontal</a:t>
+            </a:r>
+          </a:p>
+          <a:p>
+            <a:pPr algn="ctr"/>
+            <a:r>
+              <a:rPr lang="en-US" sz="1000" dirty="0">
+                <a:latin typeface="Times New Roman" panose="02020603050405020304" pitchFamily="18" charset="0"/>
+                <a:cs typeface="Times New Roman" panose="02020603050405020304" pitchFamily="18" charset="0"/>
+              </a:rPr>
+              <a:t>Spatial Position</a:t>
+            </a:r>
+          </a:p>
+        </p:txBody>
+      </p:sp>
+      <p:sp>
+        <p:nvSpPr>
+          <p:cNvPr id="176" name="TextBox 175">
+            <a:extLst>
+              <a:ext uri="{FF2B5EF4-FFF2-40B4-BE49-F238E27FC236}">
+                <a16:creationId xmlns:a16="http://schemas.microsoft.com/office/drawing/2014/main" id="{26CFBEAC-F405-07BF-FF53-2A175CF0E880}"/>
+              </a:ext>
+            </a:extLst>
+          </p:cNvPr>
+          <p:cNvSpPr txBox="1"/>
+          <p:nvPr/>
+        </p:nvSpPr>
+        <p:spPr>
+          <a:xfrm>
+            <a:off x="2427560" y="5212044"/>
+            <a:ext cx="1016625" cy="246221"/>
+          </a:xfrm>
+          <a:prstGeom prst="rect">
+            <a:avLst/>
+          </a:prstGeom>
+          <a:noFill/>
+        </p:spPr>
+        <p:txBody>
+          <a:bodyPr wrap="none" rtlCol="0">
+            <a:spAutoFit/>
+          </a:bodyPr>
+          <a:lstStyle/>
+          <a:p>
+            <a:r>
+              <a:rPr lang="en-US" sz="1000" dirty="0">
+                <a:latin typeface="Times New Roman" panose="02020603050405020304" pitchFamily="18" charset="0"/>
+                <a:cs typeface="Times New Roman" panose="02020603050405020304" pitchFamily="18" charset="0"/>
+              </a:rPr>
+              <a:t>Obstacle Height</a:t>
+            </a:r>
+          </a:p>
+        </p:txBody>
+      </p:sp>
+      <p:sp>
+        <p:nvSpPr>
+          <p:cNvPr id="177" name="TextBox 176">
+            <a:extLst>
+              <a:ext uri="{FF2B5EF4-FFF2-40B4-BE49-F238E27FC236}">
+                <a16:creationId xmlns:a16="http://schemas.microsoft.com/office/drawing/2014/main" id="{33F0B072-9FCE-C199-9ACF-A5CF2C5CFCD7}"/>
+              </a:ext>
+            </a:extLst>
+          </p:cNvPr>
+          <p:cNvSpPr txBox="1"/>
+          <p:nvPr/>
+        </p:nvSpPr>
+        <p:spPr>
+          <a:xfrm>
+            <a:off x="3339328" y="5220941"/>
+            <a:ext cx="1215397" cy="400110"/>
+          </a:xfrm>
+          <a:prstGeom prst="rect">
+            <a:avLst/>
+          </a:prstGeom>
+          <a:noFill/>
+        </p:spPr>
+        <p:txBody>
+          <a:bodyPr wrap="none" rtlCol="0">
+            <a:spAutoFit/>
+          </a:bodyPr>
+          <a:lstStyle/>
+          <a:p>
+            <a:pPr algn="ctr"/>
+            <a:r>
+              <a:rPr lang="en-US" sz="1000" dirty="0">
+                <a:latin typeface="Times New Roman" panose="02020603050405020304" pitchFamily="18" charset="0"/>
+                <a:cs typeface="Times New Roman" panose="02020603050405020304" pitchFamily="18" charset="0"/>
+              </a:rPr>
+              <a:t>Arc Apex-Obstacle </a:t>
+            </a:r>
+          </a:p>
+          <a:p>
+            <a:pPr algn="ctr"/>
+            <a:r>
+              <a:rPr lang="en-US" sz="1000" dirty="0">
+                <a:latin typeface="Times New Roman" panose="02020603050405020304" pitchFamily="18" charset="0"/>
+                <a:cs typeface="Times New Roman" panose="02020603050405020304" pitchFamily="18" charset="0"/>
+              </a:rPr>
+              <a:t>Gap</a:t>
+            </a:r>
+          </a:p>
+        </p:txBody>
+      </p:sp>
+      <p:sp>
+        <p:nvSpPr>
+          <p:cNvPr id="178" name="TextBox 177">
+            <a:extLst>
+              <a:ext uri="{FF2B5EF4-FFF2-40B4-BE49-F238E27FC236}">
+                <a16:creationId xmlns:a16="http://schemas.microsoft.com/office/drawing/2014/main" id="{C18DFFEC-DA3F-BDC7-3FFD-06EB7F199FEA}"/>
+              </a:ext>
+            </a:extLst>
+          </p:cNvPr>
+          <p:cNvSpPr txBox="1"/>
+          <p:nvPr/>
+        </p:nvSpPr>
+        <p:spPr>
+          <a:xfrm>
+            <a:off x="5068301" y="5242830"/>
+            <a:ext cx="692818" cy="400110"/>
+          </a:xfrm>
+          <a:prstGeom prst="rect">
+            <a:avLst/>
+          </a:prstGeom>
+          <a:noFill/>
+        </p:spPr>
+        <p:txBody>
+          <a:bodyPr wrap="none" rtlCol="0">
+            <a:spAutoFit/>
+          </a:bodyPr>
+          <a:lstStyle/>
+          <a:p>
+            <a:pPr algn="ctr"/>
+            <a:r>
+              <a:rPr lang="en-US" sz="1000" dirty="0">
+                <a:latin typeface="Times New Roman" panose="02020603050405020304" pitchFamily="18" charset="0"/>
+                <a:cs typeface="Times New Roman" panose="02020603050405020304" pitchFamily="18" charset="0"/>
+              </a:rPr>
+              <a:t>Arc Peak </a:t>
+            </a:r>
+          </a:p>
+          <a:p>
+            <a:pPr algn="ctr"/>
+            <a:r>
+              <a:rPr lang="en-US" sz="1000" dirty="0">
+                <a:latin typeface="Times New Roman" panose="02020603050405020304" pitchFamily="18" charset="0"/>
+                <a:cs typeface="Times New Roman" panose="02020603050405020304" pitchFamily="18" charset="0"/>
+              </a:rPr>
+              <a:t>Height</a:t>
+            </a:r>
+          </a:p>
+        </p:txBody>
+      </p:sp>
+      <p:sp>
+        <p:nvSpPr>
+          <p:cNvPr id="179" name="TextBox 178">
+            <a:extLst>
+              <a:ext uri="{FF2B5EF4-FFF2-40B4-BE49-F238E27FC236}">
+                <a16:creationId xmlns:a16="http://schemas.microsoft.com/office/drawing/2014/main" id="{412688D2-B584-0C6B-1A1B-589CD4EA27AE}"/>
+              </a:ext>
+            </a:extLst>
+          </p:cNvPr>
+          <p:cNvSpPr txBox="1"/>
+          <p:nvPr/>
+        </p:nvSpPr>
+        <p:spPr>
+          <a:xfrm>
+            <a:off x="5868415" y="5244401"/>
+            <a:ext cx="1160895" cy="400110"/>
+          </a:xfrm>
+          <a:prstGeom prst="rect">
+            <a:avLst/>
+          </a:prstGeom>
+          <a:noFill/>
+        </p:spPr>
+        <p:txBody>
+          <a:bodyPr wrap="none" rtlCol="0">
+            <a:spAutoFit/>
+          </a:bodyPr>
+          <a:lstStyle/>
+          <a:p>
+            <a:pPr algn="ctr"/>
+            <a:r>
+              <a:rPr lang="en-US" sz="1000" dirty="0">
+                <a:latin typeface="Times New Roman" panose="02020603050405020304" pitchFamily="18" charset="0"/>
+                <a:cs typeface="Times New Roman" panose="02020603050405020304" pitchFamily="18" charset="0"/>
+              </a:rPr>
+              <a:t>Kinematic Motion </a:t>
+            </a:r>
+          </a:p>
+          <a:p>
+            <a:pPr algn="ctr"/>
+            <a:r>
+              <a:rPr lang="en-US" sz="1000" dirty="0">
+                <a:latin typeface="Times New Roman" panose="02020603050405020304" pitchFamily="18" charset="0"/>
+                <a:cs typeface="Times New Roman" panose="02020603050405020304" pitchFamily="18" charset="0"/>
+              </a:rPr>
+              <a:t>Type</a:t>
+            </a:r>
+          </a:p>
+        </p:txBody>
+      </p:sp>
+      <p:sp>
+        <p:nvSpPr>
+          <p:cNvPr id="181" name="TextBox 180">
+            <a:extLst>
+              <a:ext uri="{FF2B5EF4-FFF2-40B4-BE49-F238E27FC236}">
+                <a16:creationId xmlns:a16="http://schemas.microsoft.com/office/drawing/2014/main" id="{4C443E70-C6CB-9C78-EA57-DF1439128C2D}"/>
+              </a:ext>
+            </a:extLst>
+          </p:cNvPr>
+          <p:cNvSpPr txBox="1"/>
+          <p:nvPr/>
+        </p:nvSpPr>
+        <p:spPr>
+          <a:xfrm>
+            <a:off x="12804304" y="5669872"/>
+            <a:ext cx="1770036" cy="246221"/>
+          </a:xfrm>
+          <a:prstGeom prst="rect">
+            <a:avLst/>
+          </a:prstGeom>
+          <a:noFill/>
+        </p:spPr>
+        <p:txBody>
+          <a:bodyPr wrap="none" rtlCol="0">
+            <a:spAutoFit/>
+          </a:bodyPr>
+          <a:lstStyle/>
+          <a:p>
+            <a:r>
+              <a:rPr lang="en-US" sz="1000" dirty="0">
+                <a:latin typeface="Times New Roman" panose="02020603050405020304" pitchFamily="18" charset="0"/>
+                <a:cs typeface="Times New Roman" panose="02020603050405020304" pitchFamily="18" charset="0"/>
+              </a:rPr>
+              <a:t>Horizontal Position at time = 0</a:t>
+            </a:r>
+          </a:p>
+        </p:txBody>
+      </p:sp>
+      <p:sp>
+        <p:nvSpPr>
+          <p:cNvPr id="182" name="TextBox 181">
+            <a:extLst>
+              <a:ext uri="{FF2B5EF4-FFF2-40B4-BE49-F238E27FC236}">
+                <a16:creationId xmlns:a16="http://schemas.microsoft.com/office/drawing/2014/main" id="{98B20176-B985-0134-3E49-BD575B22E31B}"/>
+              </a:ext>
+            </a:extLst>
+          </p:cNvPr>
+          <p:cNvSpPr txBox="1"/>
+          <p:nvPr/>
+        </p:nvSpPr>
+        <p:spPr>
+          <a:xfrm>
+            <a:off x="21831" y="4830044"/>
+            <a:ext cx="1300356" cy="246221"/>
+          </a:xfrm>
+          <a:prstGeom prst="rect">
+            <a:avLst/>
+          </a:prstGeom>
+          <a:noFill/>
+        </p:spPr>
+        <p:txBody>
+          <a:bodyPr wrap="none" rtlCol="0">
+            <a:spAutoFit/>
+          </a:bodyPr>
+          <a:lstStyle/>
+          <a:p>
+            <a:r>
+              <a:rPr lang="en-US" sz="1000" dirty="0">
+                <a:latin typeface="Times New Roman" panose="02020603050405020304" pitchFamily="18" charset="0"/>
+                <a:cs typeface="Times New Roman" panose="02020603050405020304" pitchFamily="18" charset="0"/>
+              </a:rPr>
+              <a:t>Surface Property Left</a:t>
+            </a:r>
+          </a:p>
+        </p:txBody>
+      </p:sp>
+      <p:sp>
+        <p:nvSpPr>
+          <p:cNvPr id="183" name="TextBox 182">
+            <a:extLst>
+              <a:ext uri="{FF2B5EF4-FFF2-40B4-BE49-F238E27FC236}">
+                <a16:creationId xmlns:a16="http://schemas.microsoft.com/office/drawing/2014/main" id="{0FA00949-8714-F713-660A-19E55E045EDA}"/>
+              </a:ext>
+            </a:extLst>
+          </p:cNvPr>
+          <p:cNvSpPr txBox="1"/>
+          <p:nvPr/>
+        </p:nvSpPr>
+        <p:spPr>
+          <a:xfrm>
+            <a:off x="7175984" y="4848264"/>
+            <a:ext cx="1369286" cy="246221"/>
+          </a:xfrm>
+          <a:prstGeom prst="rect">
+            <a:avLst/>
+          </a:prstGeom>
+          <a:noFill/>
+        </p:spPr>
+        <p:txBody>
+          <a:bodyPr wrap="none" rtlCol="0">
+            <a:spAutoFit/>
+          </a:bodyPr>
+          <a:lstStyle/>
+          <a:p>
+            <a:r>
+              <a:rPr lang="en-US" sz="1000" dirty="0">
+                <a:latin typeface="Times New Roman" panose="02020603050405020304" pitchFamily="18" charset="0"/>
+                <a:cs typeface="Times New Roman" panose="02020603050405020304" pitchFamily="18" charset="0"/>
+              </a:rPr>
+              <a:t>Surface Property Right</a:t>
+            </a:r>
+          </a:p>
+        </p:txBody>
+      </p:sp>
+      <p:sp>
+        <p:nvSpPr>
+          <p:cNvPr id="184" name="TextBox 183">
+            <a:extLst>
+              <a:ext uri="{FF2B5EF4-FFF2-40B4-BE49-F238E27FC236}">
+                <a16:creationId xmlns:a16="http://schemas.microsoft.com/office/drawing/2014/main" id="{485CC6D7-3E5C-27A4-88F5-53CA1B360130}"/>
+              </a:ext>
+            </a:extLst>
+          </p:cNvPr>
+          <p:cNvSpPr txBox="1"/>
+          <p:nvPr/>
+        </p:nvSpPr>
+        <p:spPr>
+          <a:xfrm>
+            <a:off x="1473614" y="4677146"/>
+            <a:ext cx="596638" cy="246221"/>
+          </a:xfrm>
+          <a:prstGeom prst="rect">
+            <a:avLst/>
+          </a:prstGeom>
+          <a:noFill/>
+        </p:spPr>
+        <p:txBody>
+          <a:bodyPr wrap="none" rtlCol="0">
+            <a:spAutoFit/>
+          </a:bodyPr>
+          <a:lstStyle/>
+          <a:p>
+            <a:r>
+              <a:rPr lang="en-US" sz="1000" dirty="0">
+                <a:latin typeface="Times New Roman" panose="02020603050405020304" pitchFamily="18" charset="0"/>
+                <a:cs typeface="Times New Roman" panose="02020603050405020304" pitchFamily="18" charset="0"/>
+              </a:rPr>
+              <a:t>Missing</a:t>
+            </a:r>
+          </a:p>
+        </p:txBody>
+      </p:sp>
+      <p:sp>
+        <p:nvSpPr>
+          <p:cNvPr id="185" name="TextBox 184">
+            <a:extLst>
+              <a:ext uri="{FF2B5EF4-FFF2-40B4-BE49-F238E27FC236}">
+                <a16:creationId xmlns:a16="http://schemas.microsoft.com/office/drawing/2014/main" id="{0375FE9D-DCB7-A810-24EC-847FB780DD3B}"/>
+              </a:ext>
+            </a:extLst>
+          </p:cNvPr>
+          <p:cNvSpPr txBox="1"/>
+          <p:nvPr/>
+        </p:nvSpPr>
+        <p:spPr>
+          <a:xfrm>
+            <a:off x="2289213" y="4709334"/>
+            <a:ext cx="548548" cy="246221"/>
+          </a:xfrm>
+          <a:prstGeom prst="rect">
+            <a:avLst/>
+          </a:prstGeom>
+          <a:noFill/>
+        </p:spPr>
+        <p:txBody>
+          <a:bodyPr wrap="none" rtlCol="0">
+            <a:spAutoFit/>
+          </a:bodyPr>
+          <a:lstStyle/>
+          <a:p>
+            <a:r>
+              <a:rPr lang="en-US" sz="1000" dirty="0">
+                <a:latin typeface="Times New Roman" panose="02020603050405020304" pitchFamily="18" charset="0"/>
+                <a:cs typeface="Times New Roman" panose="02020603050405020304" pitchFamily="18" charset="0"/>
+              </a:rPr>
+              <a:t>Absent</a:t>
+            </a:r>
+          </a:p>
+        </p:txBody>
+      </p:sp>
+      <p:sp>
+        <p:nvSpPr>
+          <p:cNvPr id="186" name="TextBox 185">
+            <a:extLst>
+              <a:ext uri="{FF2B5EF4-FFF2-40B4-BE49-F238E27FC236}">
+                <a16:creationId xmlns:a16="http://schemas.microsoft.com/office/drawing/2014/main" id="{C9215404-A428-A4AF-1262-D5FB2A413571}"/>
+              </a:ext>
+            </a:extLst>
+          </p:cNvPr>
+          <p:cNvSpPr txBox="1"/>
+          <p:nvPr/>
+        </p:nvSpPr>
+        <p:spPr>
+          <a:xfrm>
+            <a:off x="3381233" y="4691989"/>
+            <a:ext cx="889987" cy="246221"/>
+          </a:xfrm>
+          <a:prstGeom prst="rect">
+            <a:avLst/>
+          </a:prstGeom>
+          <a:noFill/>
+        </p:spPr>
+        <p:txBody>
+          <a:bodyPr wrap="none" rtlCol="0">
+            <a:spAutoFit/>
+          </a:bodyPr>
+          <a:lstStyle/>
+          <a:p>
+            <a:r>
+              <a:rPr lang="en-US" sz="1000" dirty="0">
+                <a:latin typeface="Times New Roman" panose="02020603050405020304" pitchFamily="18" charset="0"/>
+                <a:cs typeface="Times New Roman" panose="02020603050405020304" pitchFamily="18" charset="0"/>
+              </a:rPr>
+              <a:t>No Clearance</a:t>
+            </a:r>
+          </a:p>
+        </p:txBody>
+      </p:sp>
+      <p:sp>
+        <p:nvSpPr>
+          <p:cNvPr id="187" name="TextBox 186">
+            <a:extLst>
+              <a:ext uri="{FF2B5EF4-FFF2-40B4-BE49-F238E27FC236}">
+                <a16:creationId xmlns:a16="http://schemas.microsoft.com/office/drawing/2014/main" id="{49FB0183-F47B-7CF0-D98B-E9F55BB415C0}"/>
+              </a:ext>
+            </a:extLst>
+          </p:cNvPr>
+          <p:cNvSpPr txBox="1"/>
+          <p:nvPr/>
+        </p:nvSpPr>
+        <p:spPr>
+          <a:xfrm>
+            <a:off x="5012559" y="4675773"/>
+            <a:ext cx="1138453" cy="246221"/>
+          </a:xfrm>
+          <a:prstGeom prst="rect">
+            <a:avLst/>
+          </a:prstGeom>
+          <a:noFill/>
+        </p:spPr>
+        <p:txBody>
+          <a:bodyPr wrap="none" rtlCol="0">
+            <a:spAutoFit/>
+          </a:bodyPr>
+          <a:lstStyle/>
+          <a:p>
+            <a:r>
+              <a:rPr lang="en-US" sz="1000" dirty="0">
+                <a:latin typeface="Times New Roman" panose="02020603050405020304" pitchFamily="18" charset="0"/>
+                <a:cs typeface="Times New Roman" panose="02020603050405020304" pitchFamily="18" charset="0"/>
+              </a:rPr>
+              <a:t>Arc Peak Height 4</a:t>
+            </a:r>
+          </a:p>
+        </p:txBody>
+      </p:sp>
+      <p:sp>
+        <p:nvSpPr>
+          <p:cNvPr id="188" name="TextBox 187">
+            <a:extLst>
+              <a:ext uri="{FF2B5EF4-FFF2-40B4-BE49-F238E27FC236}">
+                <a16:creationId xmlns:a16="http://schemas.microsoft.com/office/drawing/2014/main" id="{C4AE6814-C066-2FF7-1C92-5A5E7090EFF5}"/>
+              </a:ext>
+            </a:extLst>
+          </p:cNvPr>
+          <p:cNvSpPr txBox="1"/>
+          <p:nvPr/>
+        </p:nvSpPr>
+        <p:spPr>
+          <a:xfrm>
+            <a:off x="6028572" y="4699167"/>
+            <a:ext cx="760144" cy="246221"/>
+          </a:xfrm>
+          <a:prstGeom prst="rect">
+            <a:avLst/>
+          </a:prstGeom>
+          <a:noFill/>
+        </p:spPr>
+        <p:txBody>
+          <a:bodyPr wrap="none" rtlCol="0">
+            <a:spAutoFit/>
+          </a:bodyPr>
+          <a:lstStyle/>
+          <a:p>
+            <a:r>
+              <a:rPr lang="en-US" sz="1000" dirty="0">
+                <a:latin typeface="Times New Roman" panose="02020603050405020304" pitchFamily="18" charset="0"/>
+                <a:cs typeface="Times New Roman" panose="02020603050405020304" pitchFamily="18" charset="0"/>
+              </a:rPr>
+              <a:t>Arced Path</a:t>
+            </a:r>
+          </a:p>
+        </p:txBody>
+      </p:sp>
+      <p:sp>
+        <p:nvSpPr>
+          <p:cNvPr id="189" name="TextBox 188">
+            <a:extLst>
+              <a:ext uri="{FF2B5EF4-FFF2-40B4-BE49-F238E27FC236}">
+                <a16:creationId xmlns:a16="http://schemas.microsoft.com/office/drawing/2014/main" id="{49DE63A5-E5F9-CF3B-23C2-253E5A86CD08}"/>
+              </a:ext>
+            </a:extLst>
+          </p:cNvPr>
+          <p:cNvSpPr txBox="1"/>
+          <p:nvPr/>
+        </p:nvSpPr>
+        <p:spPr>
+          <a:xfrm>
+            <a:off x="10482311" y="4697280"/>
+            <a:ext cx="596638" cy="246221"/>
+          </a:xfrm>
+          <a:prstGeom prst="rect">
+            <a:avLst/>
+          </a:prstGeom>
+          <a:noFill/>
+        </p:spPr>
+        <p:txBody>
+          <a:bodyPr wrap="none" rtlCol="0">
+            <a:spAutoFit/>
+          </a:bodyPr>
+          <a:lstStyle/>
+          <a:p>
+            <a:r>
+              <a:rPr lang="en-US" sz="1000" dirty="0">
+                <a:latin typeface="Times New Roman" panose="02020603050405020304" pitchFamily="18" charset="0"/>
+                <a:cs typeface="Times New Roman" panose="02020603050405020304" pitchFamily="18" charset="0"/>
+              </a:rPr>
+              <a:t>Missing</a:t>
+            </a:r>
+          </a:p>
+        </p:txBody>
+      </p:sp>
+      <p:sp>
+        <p:nvSpPr>
+          <p:cNvPr id="190" name="TextBox 189">
+            <a:extLst>
+              <a:ext uri="{FF2B5EF4-FFF2-40B4-BE49-F238E27FC236}">
+                <a16:creationId xmlns:a16="http://schemas.microsoft.com/office/drawing/2014/main" id="{8119E326-B601-6DDB-875A-62258820EEE3}"/>
+              </a:ext>
+            </a:extLst>
+          </p:cNvPr>
+          <p:cNvSpPr txBox="1"/>
+          <p:nvPr/>
+        </p:nvSpPr>
+        <p:spPr>
+          <a:xfrm>
+            <a:off x="11263620" y="4729468"/>
+            <a:ext cx="723275" cy="246221"/>
+          </a:xfrm>
+          <a:prstGeom prst="rect">
+            <a:avLst/>
+          </a:prstGeom>
+          <a:noFill/>
+        </p:spPr>
+        <p:txBody>
+          <a:bodyPr wrap="none" rtlCol="0">
+            <a:spAutoFit/>
+          </a:bodyPr>
+          <a:lstStyle/>
+          <a:p>
+            <a:r>
+              <a:rPr lang="en-US" sz="1000" dirty="0">
+                <a:latin typeface="Times New Roman" panose="02020603050405020304" pitchFamily="18" charset="0"/>
+                <a:cs typeface="Times New Roman" panose="02020603050405020304" pitchFamily="18" charset="0"/>
+              </a:rPr>
+              <a:t>No Height</a:t>
+            </a:r>
+          </a:p>
+        </p:txBody>
+      </p:sp>
+      <p:sp>
+        <p:nvSpPr>
+          <p:cNvPr id="191" name="TextBox 190">
+            <a:extLst>
+              <a:ext uri="{FF2B5EF4-FFF2-40B4-BE49-F238E27FC236}">
+                <a16:creationId xmlns:a16="http://schemas.microsoft.com/office/drawing/2014/main" id="{4AEA3F17-CDD7-1F90-15CA-3166351A5470}"/>
+              </a:ext>
+            </a:extLst>
+          </p:cNvPr>
+          <p:cNvSpPr txBox="1"/>
+          <p:nvPr/>
+        </p:nvSpPr>
+        <p:spPr>
+          <a:xfrm>
+            <a:off x="12389930" y="4712123"/>
+            <a:ext cx="889987" cy="246221"/>
+          </a:xfrm>
+          <a:prstGeom prst="rect">
+            <a:avLst/>
+          </a:prstGeom>
+          <a:noFill/>
+        </p:spPr>
+        <p:txBody>
+          <a:bodyPr wrap="none" rtlCol="0">
+            <a:spAutoFit/>
+          </a:bodyPr>
+          <a:lstStyle/>
+          <a:p>
+            <a:r>
+              <a:rPr lang="en-US" sz="1000" dirty="0">
+                <a:latin typeface="Times New Roman" panose="02020603050405020304" pitchFamily="18" charset="0"/>
+                <a:cs typeface="Times New Roman" panose="02020603050405020304" pitchFamily="18" charset="0"/>
+              </a:rPr>
+              <a:t>No Clearance</a:t>
+            </a:r>
+          </a:p>
+        </p:txBody>
+      </p:sp>
+      <p:sp>
+        <p:nvSpPr>
+          <p:cNvPr id="192" name="TextBox 191">
+            <a:extLst>
+              <a:ext uri="{FF2B5EF4-FFF2-40B4-BE49-F238E27FC236}">
+                <a16:creationId xmlns:a16="http://schemas.microsoft.com/office/drawing/2014/main" id="{1BBF65C3-A923-2D26-B29B-992E46130D80}"/>
+              </a:ext>
+            </a:extLst>
+          </p:cNvPr>
+          <p:cNvSpPr txBox="1"/>
+          <p:nvPr/>
+        </p:nvSpPr>
+        <p:spPr>
+          <a:xfrm>
+            <a:off x="14066976" y="4673047"/>
+            <a:ext cx="1098378" cy="246221"/>
+          </a:xfrm>
+          <a:prstGeom prst="rect">
+            <a:avLst/>
+          </a:prstGeom>
+          <a:noFill/>
+        </p:spPr>
+        <p:txBody>
+          <a:bodyPr wrap="none" rtlCol="0">
+            <a:spAutoFit/>
+          </a:bodyPr>
+          <a:lstStyle/>
+          <a:p>
+            <a:r>
+              <a:rPr lang="en-US" sz="1000" dirty="0">
+                <a:latin typeface="Times New Roman" panose="02020603050405020304" pitchFamily="18" charset="0"/>
+                <a:cs typeface="Times New Roman" panose="02020603050405020304" pitchFamily="18" charset="0"/>
+              </a:rPr>
+              <a:t>No Arced Motion</a:t>
+            </a:r>
+          </a:p>
+        </p:txBody>
+      </p:sp>
+      <p:sp>
+        <p:nvSpPr>
+          <p:cNvPr id="193" name="TextBox 192">
+            <a:extLst>
+              <a:ext uri="{FF2B5EF4-FFF2-40B4-BE49-F238E27FC236}">
+                <a16:creationId xmlns:a16="http://schemas.microsoft.com/office/drawing/2014/main" id="{C9574F72-B8A8-74B4-89F0-744EE049CE20}"/>
+              </a:ext>
+            </a:extLst>
+          </p:cNvPr>
+          <p:cNvSpPr txBox="1"/>
+          <p:nvPr/>
+        </p:nvSpPr>
+        <p:spPr>
+          <a:xfrm>
+            <a:off x="15037269" y="4683205"/>
+            <a:ext cx="780983" cy="246221"/>
+          </a:xfrm>
+          <a:prstGeom prst="rect">
+            <a:avLst/>
+          </a:prstGeom>
+          <a:noFill/>
+        </p:spPr>
+        <p:txBody>
+          <a:bodyPr wrap="none" rtlCol="0">
+            <a:spAutoFit/>
+          </a:bodyPr>
+          <a:lstStyle/>
+          <a:p>
+            <a:r>
+              <a:rPr lang="en-US" sz="1000" dirty="0">
+                <a:latin typeface="Times New Roman" panose="02020603050405020304" pitchFamily="18" charset="0"/>
+                <a:cs typeface="Times New Roman" panose="02020603050405020304" pitchFamily="18" charset="0"/>
+              </a:rPr>
+              <a:t>Linear Path</a:t>
+            </a:r>
+          </a:p>
+        </p:txBody>
+      </p:sp>
+      <p:sp>
+        <p:nvSpPr>
+          <p:cNvPr id="194" name="TextBox 193">
+            <a:extLst>
+              <a:ext uri="{FF2B5EF4-FFF2-40B4-BE49-F238E27FC236}">
+                <a16:creationId xmlns:a16="http://schemas.microsoft.com/office/drawing/2014/main" id="{F4108ADF-0D2E-1D66-B54E-64F6B6039D59}"/>
+              </a:ext>
+            </a:extLst>
+          </p:cNvPr>
+          <p:cNvSpPr txBox="1"/>
+          <p:nvPr/>
+        </p:nvSpPr>
+        <p:spPr>
+          <a:xfrm>
+            <a:off x="4412704" y="5196582"/>
+            <a:ext cx="736099" cy="400110"/>
+          </a:xfrm>
+          <a:prstGeom prst="rect">
+            <a:avLst/>
+          </a:prstGeom>
+          <a:noFill/>
+        </p:spPr>
+        <p:txBody>
+          <a:bodyPr wrap="none" rtlCol="0">
+            <a:spAutoFit/>
+          </a:bodyPr>
+          <a:lstStyle/>
+          <a:p>
+            <a:pPr algn="ctr"/>
+            <a:r>
+              <a:rPr lang="en-US" sz="1000" dirty="0">
+                <a:latin typeface="Times New Roman" panose="02020603050405020304" pitchFamily="18" charset="0"/>
+                <a:cs typeface="Times New Roman" panose="02020603050405020304" pitchFamily="18" charset="0"/>
+              </a:rPr>
+              <a:t>Final </a:t>
+            </a:r>
+          </a:p>
+          <a:p>
+            <a:pPr algn="ctr"/>
+            <a:r>
+              <a:rPr lang="en-US" sz="1000" dirty="0">
+                <a:latin typeface="Times New Roman" panose="02020603050405020304" pitchFamily="18" charset="0"/>
+                <a:cs typeface="Times New Roman" panose="02020603050405020304" pitchFamily="18" charset="0"/>
+              </a:rPr>
+              <a:t>Adjacency</a:t>
+            </a:r>
+          </a:p>
+        </p:txBody>
+      </p:sp>
+      <p:sp>
+        <p:nvSpPr>
+          <p:cNvPr id="195" name="TextBox 194">
+            <a:extLst>
+              <a:ext uri="{FF2B5EF4-FFF2-40B4-BE49-F238E27FC236}">
+                <a16:creationId xmlns:a16="http://schemas.microsoft.com/office/drawing/2014/main" id="{09D01B04-6448-2325-7CA8-3CBAF79BBC47}"/>
+              </a:ext>
+            </a:extLst>
+          </p:cNvPr>
+          <p:cNvSpPr txBox="1"/>
+          <p:nvPr/>
+        </p:nvSpPr>
+        <p:spPr>
+          <a:xfrm>
+            <a:off x="15068800" y="5281164"/>
+            <a:ext cx="1160895" cy="400110"/>
+          </a:xfrm>
+          <a:prstGeom prst="rect">
+            <a:avLst/>
+          </a:prstGeom>
+          <a:noFill/>
+        </p:spPr>
+        <p:txBody>
+          <a:bodyPr wrap="none" rtlCol="0">
+            <a:spAutoFit/>
+          </a:bodyPr>
+          <a:lstStyle/>
+          <a:p>
+            <a:pPr algn="ctr"/>
+            <a:r>
+              <a:rPr lang="en-US" sz="1000" dirty="0">
+                <a:latin typeface="Times New Roman" panose="02020603050405020304" pitchFamily="18" charset="0"/>
+                <a:cs typeface="Times New Roman" panose="02020603050405020304" pitchFamily="18" charset="0"/>
+              </a:rPr>
+              <a:t>Kinematic Motion </a:t>
+            </a:r>
+          </a:p>
+          <a:p>
+            <a:pPr algn="ctr"/>
+            <a:r>
+              <a:rPr lang="en-US" sz="1000" dirty="0">
+                <a:latin typeface="Times New Roman" panose="02020603050405020304" pitchFamily="18" charset="0"/>
+                <a:cs typeface="Times New Roman" panose="02020603050405020304" pitchFamily="18" charset="0"/>
+              </a:rPr>
+              <a:t>Type</a:t>
+            </a:r>
+          </a:p>
+        </p:txBody>
+      </p:sp>
+      <p:sp>
+        <p:nvSpPr>
+          <p:cNvPr id="196" name="TextBox 195">
+            <a:extLst>
+              <a:ext uri="{FF2B5EF4-FFF2-40B4-BE49-F238E27FC236}">
+                <a16:creationId xmlns:a16="http://schemas.microsoft.com/office/drawing/2014/main" id="{B11B73B0-E40E-8270-5B8B-108C0E5C3A86}"/>
+              </a:ext>
+            </a:extLst>
+          </p:cNvPr>
+          <p:cNvSpPr txBox="1"/>
+          <p:nvPr/>
+        </p:nvSpPr>
+        <p:spPr>
+          <a:xfrm>
+            <a:off x="9089900" y="4811575"/>
+            <a:ext cx="1300356" cy="246221"/>
+          </a:xfrm>
+          <a:prstGeom prst="rect">
+            <a:avLst/>
+          </a:prstGeom>
+          <a:noFill/>
+        </p:spPr>
+        <p:txBody>
+          <a:bodyPr wrap="none" rtlCol="0">
+            <a:spAutoFit/>
+          </a:bodyPr>
+          <a:lstStyle/>
+          <a:p>
+            <a:r>
+              <a:rPr lang="en-US" sz="1000" dirty="0">
+                <a:latin typeface="Times New Roman" panose="02020603050405020304" pitchFamily="18" charset="0"/>
+                <a:cs typeface="Times New Roman" panose="02020603050405020304" pitchFamily="18" charset="0"/>
+              </a:rPr>
+              <a:t>Surface Property Left</a:t>
+            </a:r>
+          </a:p>
+        </p:txBody>
+      </p:sp>
+      <p:sp>
+        <p:nvSpPr>
+          <p:cNvPr id="197" name="TextBox 196">
+            <a:extLst>
+              <a:ext uri="{FF2B5EF4-FFF2-40B4-BE49-F238E27FC236}">
+                <a16:creationId xmlns:a16="http://schemas.microsoft.com/office/drawing/2014/main" id="{9F2A3AD1-4163-9059-0670-D433862B305B}"/>
+              </a:ext>
+            </a:extLst>
+          </p:cNvPr>
+          <p:cNvSpPr txBox="1"/>
+          <p:nvPr/>
+        </p:nvSpPr>
+        <p:spPr>
+          <a:xfrm>
+            <a:off x="16244053" y="4829795"/>
+            <a:ext cx="1369286" cy="246221"/>
+          </a:xfrm>
+          <a:prstGeom prst="rect">
+            <a:avLst/>
+          </a:prstGeom>
+          <a:noFill/>
+        </p:spPr>
+        <p:txBody>
+          <a:bodyPr wrap="none" rtlCol="0">
+            <a:spAutoFit/>
+          </a:bodyPr>
+          <a:lstStyle/>
+          <a:p>
+            <a:r>
+              <a:rPr lang="en-US" sz="1000" dirty="0">
+                <a:latin typeface="Times New Roman" panose="02020603050405020304" pitchFamily="18" charset="0"/>
+                <a:cs typeface="Times New Roman" panose="02020603050405020304" pitchFamily="18" charset="0"/>
+              </a:rPr>
+              <a:t>Surface Property Right</a:t>
+            </a:r>
+          </a:p>
+        </p:txBody>
+      </p:sp>
+      <p:sp>
+        <p:nvSpPr>
+          <p:cNvPr id="198" name="TextBox 197">
+            <a:extLst>
+              <a:ext uri="{FF2B5EF4-FFF2-40B4-BE49-F238E27FC236}">
+                <a16:creationId xmlns:a16="http://schemas.microsoft.com/office/drawing/2014/main" id="{51869C2E-DD37-5ED7-08AC-0FABFE31CC0B}"/>
+              </a:ext>
+            </a:extLst>
+          </p:cNvPr>
+          <p:cNvSpPr txBox="1"/>
+          <p:nvPr/>
+        </p:nvSpPr>
+        <p:spPr>
+          <a:xfrm>
+            <a:off x="10395675" y="5222224"/>
+            <a:ext cx="990977" cy="553998"/>
+          </a:xfrm>
+          <a:prstGeom prst="rect">
+            <a:avLst/>
+          </a:prstGeom>
+          <a:noFill/>
+        </p:spPr>
+        <p:txBody>
+          <a:bodyPr wrap="none" rtlCol="0">
+            <a:spAutoFit/>
+          </a:bodyPr>
+          <a:lstStyle/>
+          <a:p>
+            <a:pPr algn="ctr"/>
+            <a:r>
+              <a:rPr lang="en-US" sz="1000" dirty="0">
+                <a:latin typeface="Times New Roman" panose="02020603050405020304" pitchFamily="18" charset="0"/>
+                <a:cs typeface="Times New Roman" panose="02020603050405020304" pitchFamily="18" charset="0"/>
+              </a:rPr>
+              <a:t>Obstacle </a:t>
+            </a:r>
+          </a:p>
+          <a:p>
+            <a:pPr algn="ctr"/>
+            <a:r>
+              <a:rPr lang="en-US" sz="1000" dirty="0">
+                <a:latin typeface="Times New Roman" panose="02020603050405020304" pitchFamily="18" charset="0"/>
+                <a:cs typeface="Times New Roman" panose="02020603050405020304" pitchFamily="18" charset="0"/>
+              </a:rPr>
+              <a:t>Horizontal</a:t>
+            </a:r>
+          </a:p>
+          <a:p>
+            <a:pPr algn="ctr"/>
+            <a:r>
+              <a:rPr lang="en-US" sz="1000" dirty="0">
+                <a:latin typeface="Times New Roman" panose="02020603050405020304" pitchFamily="18" charset="0"/>
+                <a:cs typeface="Times New Roman" panose="02020603050405020304" pitchFamily="18" charset="0"/>
+              </a:rPr>
+              <a:t>Spatial Position</a:t>
+            </a:r>
+          </a:p>
+        </p:txBody>
+      </p:sp>
+      <p:sp>
+        <p:nvSpPr>
+          <p:cNvPr id="199" name="TextBox 198">
+            <a:extLst>
+              <a:ext uri="{FF2B5EF4-FFF2-40B4-BE49-F238E27FC236}">
+                <a16:creationId xmlns:a16="http://schemas.microsoft.com/office/drawing/2014/main" id="{3CF09CC7-3410-A4CF-3205-2DFB5C511100}"/>
+              </a:ext>
+            </a:extLst>
+          </p:cNvPr>
+          <p:cNvSpPr txBox="1"/>
+          <p:nvPr/>
+        </p:nvSpPr>
+        <p:spPr>
+          <a:xfrm>
+            <a:off x="11368679" y="5215226"/>
+            <a:ext cx="1016625" cy="246221"/>
+          </a:xfrm>
+          <a:prstGeom prst="rect">
+            <a:avLst/>
+          </a:prstGeom>
+          <a:noFill/>
+        </p:spPr>
+        <p:txBody>
+          <a:bodyPr wrap="none" rtlCol="0">
+            <a:spAutoFit/>
+          </a:bodyPr>
+          <a:lstStyle/>
+          <a:p>
+            <a:r>
+              <a:rPr lang="en-US" sz="1000" dirty="0">
+                <a:latin typeface="Times New Roman" panose="02020603050405020304" pitchFamily="18" charset="0"/>
+                <a:cs typeface="Times New Roman" panose="02020603050405020304" pitchFamily="18" charset="0"/>
+              </a:rPr>
+              <a:t>Obstacle Height</a:t>
+            </a:r>
+          </a:p>
+        </p:txBody>
+      </p:sp>
+      <p:sp>
+        <p:nvSpPr>
+          <p:cNvPr id="200" name="TextBox 199">
+            <a:extLst>
+              <a:ext uri="{FF2B5EF4-FFF2-40B4-BE49-F238E27FC236}">
+                <a16:creationId xmlns:a16="http://schemas.microsoft.com/office/drawing/2014/main" id="{CB906C97-7796-ABD5-D2E0-0D4A8E669E0C}"/>
+              </a:ext>
+            </a:extLst>
+          </p:cNvPr>
+          <p:cNvSpPr txBox="1"/>
+          <p:nvPr/>
+        </p:nvSpPr>
+        <p:spPr>
+          <a:xfrm>
+            <a:off x="12361070" y="5212044"/>
+            <a:ext cx="1215397" cy="400110"/>
+          </a:xfrm>
+          <a:prstGeom prst="rect">
+            <a:avLst/>
+          </a:prstGeom>
+          <a:noFill/>
+        </p:spPr>
+        <p:txBody>
+          <a:bodyPr wrap="none" rtlCol="0">
+            <a:spAutoFit/>
+          </a:bodyPr>
+          <a:lstStyle/>
+          <a:p>
+            <a:pPr algn="ctr"/>
+            <a:r>
+              <a:rPr lang="en-US" sz="1000" dirty="0">
+                <a:latin typeface="Times New Roman" panose="02020603050405020304" pitchFamily="18" charset="0"/>
+                <a:cs typeface="Times New Roman" panose="02020603050405020304" pitchFamily="18" charset="0"/>
+              </a:rPr>
+              <a:t>Arc Apex-Obstacle </a:t>
+            </a:r>
+          </a:p>
+          <a:p>
+            <a:pPr algn="ctr"/>
+            <a:r>
+              <a:rPr lang="en-US" sz="1000" dirty="0">
+                <a:latin typeface="Times New Roman" panose="02020603050405020304" pitchFamily="18" charset="0"/>
+                <a:cs typeface="Times New Roman" panose="02020603050405020304" pitchFamily="18" charset="0"/>
+              </a:rPr>
+              <a:t>Gap</a:t>
+            </a:r>
+          </a:p>
+        </p:txBody>
+      </p:sp>
+      <p:sp>
+        <p:nvSpPr>
+          <p:cNvPr id="201" name="TextBox 200">
+            <a:extLst>
+              <a:ext uri="{FF2B5EF4-FFF2-40B4-BE49-F238E27FC236}">
+                <a16:creationId xmlns:a16="http://schemas.microsoft.com/office/drawing/2014/main" id="{67BFEBCF-38AA-9A96-F8E7-F9C6BFD6AC51}"/>
+              </a:ext>
+            </a:extLst>
+          </p:cNvPr>
+          <p:cNvSpPr txBox="1"/>
+          <p:nvPr/>
+        </p:nvSpPr>
+        <p:spPr>
+          <a:xfrm>
+            <a:off x="13604732" y="5164914"/>
+            <a:ext cx="736099" cy="400110"/>
+          </a:xfrm>
+          <a:prstGeom prst="rect">
+            <a:avLst/>
+          </a:prstGeom>
+          <a:noFill/>
+        </p:spPr>
+        <p:txBody>
+          <a:bodyPr wrap="none" rtlCol="0">
+            <a:spAutoFit/>
+          </a:bodyPr>
+          <a:lstStyle/>
+          <a:p>
+            <a:pPr algn="ctr"/>
+            <a:r>
+              <a:rPr lang="en-US" sz="1000" dirty="0">
+                <a:latin typeface="Times New Roman" panose="02020603050405020304" pitchFamily="18" charset="0"/>
+                <a:cs typeface="Times New Roman" panose="02020603050405020304" pitchFamily="18" charset="0"/>
+              </a:rPr>
+              <a:t>Final </a:t>
+            </a:r>
+          </a:p>
+          <a:p>
+            <a:pPr algn="ctr"/>
+            <a:r>
+              <a:rPr lang="en-US" sz="1000" dirty="0">
+                <a:latin typeface="Times New Roman" panose="02020603050405020304" pitchFamily="18" charset="0"/>
+                <a:cs typeface="Times New Roman" panose="02020603050405020304" pitchFamily="18" charset="0"/>
+              </a:rPr>
+              <a:t>Adjacency</a:t>
+            </a:r>
+          </a:p>
+        </p:txBody>
+      </p:sp>
+      <p:sp>
+        <p:nvSpPr>
+          <p:cNvPr id="202" name="TextBox 201">
+            <a:extLst>
+              <a:ext uri="{FF2B5EF4-FFF2-40B4-BE49-F238E27FC236}">
+                <a16:creationId xmlns:a16="http://schemas.microsoft.com/office/drawing/2014/main" id="{DCD6D09C-639F-501B-DBB1-C76FF91C4BA2}"/>
+              </a:ext>
+            </a:extLst>
+          </p:cNvPr>
+          <p:cNvSpPr txBox="1"/>
+          <p:nvPr/>
+        </p:nvSpPr>
+        <p:spPr>
+          <a:xfrm>
+            <a:off x="14458022" y="5246848"/>
+            <a:ext cx="692818" cy="400110"/>
+          </a:xfrm>
+          <a:prstGeom prst="rect">
+            <a:avLst/>
+          </a:prstGeom>
+          <a:noFill/>
+        </p:spPr>
+        <p:txBody>
+          <a:bodyPr wrap="none" rtlCol="0">
+            <a:spAutoFit/>
+          </a:bodyPr>
+          <a:lstStyle/>
+          <a:p>
+            <a:pPr algn="ctr"/>
+            <a:r>
+              <a:rPr lang="en-US" sz="1000" dirty="0">
+                <a:latin typeface="Times New Roman" panose="02020603050405020304" pitchFamily="18" charset="0"/>
+                <a:cs typeface="Times New Roman" panose="02020603050405020304" pitchFamily="18" charset="0"/>
+              </a:rPr>
+              <a:t>Arc Peak </a:t>
+            </a:r>
+          </a:p>
+          <a:p>
+            <a:pPr algn="ctr"/>
+            <a:r>
+              <a:rPr lang="en-US" sz="1000" dirty="0">
+                <a:latin typeface="Times New Roman" panose="02020603050405020304" pitchFamily="18" charset="0"/>
+                <a:cs typeface="Times New Roman" panose="02020603050405020304" pitchFamily="18" charset="0"/>
+              </a:rPr>
+              <a:t>Height</a:t>
+            </a:r>
+          </a:p>
+        </p:txBody>
+      </p:sp>
+      <p:pic>
+        <p:nvPicPr>
+          <p:cNvPr id="203" name="Picture 202">
+            <a:extLst>
+              <a:ext uri="{FF2B5EF4-FFF2-40B4-BE49-F238E27FC236}">
+                <a16:creationId xmlns:a16="http://schemas.microsoft.com/office/drawing/2014/main" id="{3AD12F1F-158E-A2F9-F976-DD1E2533B818}"/>
+              </a:ext>
+            </a:extLst>
+          </p:cNvPr>
+          <p:cNvPicPr>
+            <a:picLocks noChangeAspect="1"/>
+          </p:cNvPicPr>
+          <p:nvPr/>
+        </p:nvPicPr>
+        <p:blipFill>
+          <a:blip r:embed="rId12"/>
+          <a:stretch>
+            <a:fillRect/>
+          </a:stretch>
+        </p:blipFill>
+        <p:spPr>
+          <a:xfrm>
+            <a:off x="13163214" y="5862817"/>
+            <a:ext cx="847725" cy="180975"/>
+          </a:xfrm>
+          <a:prstGeom prst="rect">
+            <a:avLst/>
+          </a:prstGeom>
+        </p:spPr>
+      </p:pic>
+      <p:sp>
+        <p:nvSpPr>
+          <p:cNvPr id="204" name="TextBox 203">
+            <a:extLst>
+              <a:ext uri="{FF2B5EF4-FFF2-40B4-BE49-F238E27FC236}">
+                <a16:creationId xmlns:a16="http://schemas.microsoft.com/office/drawing/2014/main" id="{100D6A07-BB94-1BE8-A342-C0F2E0E953C1}"/>
+              </a:ext>
+            </a:extLst>
+          </p:cNvPr>
+          <p:cNvSpPr txBox="1"/>
+          <p:nvPr/>
+        </p:nvSpPr>
+        <p:spPr>
+          <a:xfrm>
+            <a:off x="3257503" y="5590699"/>
+            <a:ext cx="1834156" cy="246221"/>
+          </a:xfrm>
+          <a:prstGeom prst="rect">
+            <a:avLst/>
+          </a:prstGeom>
+          <a:noFill/>
+        </p:spPr>
+        <p:txBody>
+          <a:bodyPr wrap="none" rtlCol="0">
+            <a:spAutoFit/>
+          </a:bodyPr>
+          <a:lstStyle/>
+          <a:p>
+            <a:r>
+              <a:rPr lang="en-US" sz="1000" dirty="0">
+                <a:latin typeface="Times New Roman" panose="02020603050405020304" pitchFamily="18" charset="0"/>
+                <a:cs typeface="Times New Roman" panose="02020603050405020304" pitchFamily="18" charset="0"/>
+              </a:rPr>
+              <a:t>Horizontal Position at time = 0</a:t>
+            </a:r>
+          </a:p>
+        </p:txBody>
+      </p:sp>
+      <p:pic>
+        <p:nvPicPr>
+          <p:cNvPr id="205" name="Picture 204">
+            <a:extLst>
+              <a:ext uri="{FF2B5EF4-FFF2-40B4-BE49-F238E27FC236}">
+                <a16:creationId xmlns:a16="http://schemas.microsoft.com/office/drawing/2014/main" id="{52473BFB-9FED-6E6B-85AA-7E120193DEA2}"/>
+              </a:ext>
+            </a:extLst>
+          </p:cNvPr>
+          <p:cNvPicPr>
+            <a:picLocks noChangeAspect="1"/>
+          </p:cNvPicPr>
+          <p:nvPr/>
+        </p:nvPicPr>
+        <p:blipFill>
+          <a:blip r:embed="rId47"/>
+          <a:stretch>
+            <a:fillRect/>
+          </a:stretch>
+        </p:blipFill>
+        <p:spPr>
+          <a:xfrm>
+            <a:off x="3836208" y="996403"/>
+            <a:ext cx="841733" cy="154799"/>
+          </a:xfrm>
+          <a:prstGeom prst="rect">
+            <a:avLst/>
+          </a:prstGeom>
+        </p:spPr>
+      </p:pic>
+      <p:sp>
+        <p:nvSpPr>
+          <p:cNvPr id="206" name="TextBox 205">
+            <a:extLst>
+              <a:ext uri="{FF2B5EF4-FFF2-40B4-BE49-F238E27FC236}">
+                <a16:creationId xmlns:a16="http://schemas.microsoft.com/office/drawing/2014/main" id="{3E489613-1628-AE02-802A-9C082071970D}"/>
+              </a:ext>
+            </a:extLst>
+          </p:cNvPr>
+          <p:cNvSpPr txBox="1"/>
+          <p:nvPr/>
+        </p:nvSpPr>
+        <p:spPr>
+          <a:xfrm>
+            <a:off x="3460178" y="697348"/>
+            <a:ext cx="1770036" cy="246221"/>
+          </a:xfrm>
+          <a:prstGeom prst="rect">
+            <a:avLst/>
+          </a:prstGeom>
+          <a:noFill/>
+        </p:spPr>
+        <p:txBody>
+          <a:bodyPr wrap="none" rtlCol="0">
+            <a:spAutoFit/>
+          </a:bodyPr>
+          <a:lstStyle/>
+          <a:p>
+            <a:r>
+              <a:rPr lang="en-US" sz="1000" dirty="0">
+                <a:latin typeface="Times New Roman" panose="02020603050405020304" pitchFamily="18" charset="0"/>
+                <a:cs typeface="Times New Roman" panose="02020603050405020304" pitchFamily="18" charset="0"/>
+              </a:rPr>
+              <a:t>Horizontal Position at time = 1</a:t>
+            </a:r>
+          </a:p>
+        </p:txBody>
+      </p:sp>
+      <p:pic>
+        <p:nvPicPr>
+          <p:cNvPr id="207" name="Picture 206">
+            <a:extLst>
+              <a:ext uri="{FF2B5EF4-FFF2-40B4-BE49-F238E27FC236}">
+                <a16:creationId xmlns:a16="http://schemas.microsoft.com/office/drawing/2014/main" id="{CC767C31-BCA7-06A4-4A11-89318F77AF5D}"/>
+              </a:ext>
+            </a:extLst>
+          </p:cNvPr>
+          <p:cNvPicPr>
+            <a:picLocks noChangeAspect="1"/>
+          </p:cNvPicPr>
+          <p:nvPr/>
+        </p:nvPicPr>
+        <p:blipFill>
+          <a:blip r:embed="rId48"/>
+          <a:stretch>
+            <a:fillRect/>
+          </a:stretch>
+        </p:blipFill>
+        <p:spPr>
+          <a:xfrm>
+            <a:off x="13129711" y="981161"/>
+            <a:ext cx="828675" cy="152400"/>
+          </a:xfrm>
+          <a:prstGeom prst="rect">
+            <a:avLst/>
+          </a:prstGeom>
+        </p:spPr>
+      </p:pic>
+      <p:sp>
+        <p:nvSpPr>
+          <p:cNvPr id="208" name="TextBox 207">
+            <a:extLst>
+              <a:ext uri="{FF2B5EF4-FFF2-40B4-BE49-F238E27FC236}">
+                <a16:creationId xmlns:a16="http://schemas.microsoft.com/office/drawing/2014/main" id="{37B518C7-D4F5-EF67-4D9F-10E8FC3D3912}"/>
+              </a:ext>
+            </a:extLst>
+          </p:cNvPr>
+          <p:cNvSpPr txBox="1"/>
+          <p:nvPr/>
+        </p:nvSpPr>
+        <p:spPr>
+          <a:xfrm>
+            <a:off x="12651760" y="692517"/>
+            <a:ext cx="1770036" cy="246221"/>
+          </a:xfrm>
+          <a:prstGeom prst="rect">
+            <a:avLst/>
+          </a:prstGeom>
+          <a:noFill/>
+        </p:spPr>
+        <p:txBody>
+          <a:bodyPr wrap="none" rtlCol="0">
+            <a:spAutoFit/>
+          </a:bodyPr>
+          <a:lstStyle/>
+          <a:p>
+            <a:r>
+              <a:rPr lang="en-US" sz="1000" dirty="0">
+                <a:latin typeface="Times New Roman" panose="02020603050405020304" pitchFamily="18" charset="0"/>
+                <a:cs typeface="Times New Roman" panose="02020603050405020304" pitchFamily="18" charset="0"/>
+              </a:rPr>
+              <a:t>Horizontal Position at time = 2</a:t>
+            </a:r>
+          </a:p>
+        </p:txBody>
+      </p:sp>
     </p:spTree>
     <p:extLst>
       <p:ext uri="{BB962C8B-B14F-4D97-AF65-F5344CB8AC3E}">
